--- a/Week 7/7 - RNNs for Text.pptx
+++ b/Week 7/7 - RNNs for Text.pptx
@@ -5,48 +5,49 @@
     <p:sldMasterId id="2147483648" r:id="rId1"/>
   </p:sldMasterIdLst>
   <p:notesMasterIdLst>
-    <p:notesMasterId r:id="rId26"/>
+    <p:notesMasterId r:id="rId27"/>
   </p:notesMasterIdLst>
   <p:sldIdLst>
     <p:sldId id="256" r:id="rId2"/>
     <p:sldId id="258" r:id="rId3"/>
-    <p:sldId id="259" r:id="rId4"/>
-    <p:sldId id="260" r:id="rId5"/>
-    <p:sldId id="261" r:id="rId6"/>
-    <p:sldId id="280" r:id="rId7"/>
-    <p:sldId id="276" r:id="rId8"/>
-    <p:sldId id="284" r:id="rId9"/>
-    <p:sldId id="277" r:id="rId10"/>
-    <p:sldId id="283" r:id="rId11"/>
-    <p:sldId id="263" r:id="rId12"/>
-    <p:sldId id="278" r:id="rId13"/>
-    <p:sldId id="265" r:id="rId14"/>
-    <p:sldId id="279" r:id="rId15"/>
-    <p:sldId id="268" r:id="rId16"/>
-    <p:sldId id="269" r:id="rId17"/>
-    <p:sldId id="281" r:id="rId18"/>
-    <p:sldId id="282" r:id="rId19"/>
-    <p:sldId id="264" r:id="rId20"/>
-    <p:sldId id="266" r:id="rId21"/>
-    <p:sldId id="267" r:id="rId22"/>
-    <p:sldId id="273" r:id="rId23"/>
-    <p:sldId id="274" r:id="rId24"/>
-    <p:sldId id="275" r:id="rId25"/>
+    <p:sldId id="285" r:id="rId4"/>
+    <p:sldId id="259" r:id="rId5"/>
+    <p:sldId id="260" r:id="rId6"/>
+    <p:sldId id="261" r:id="rId7"/>
+    <p:sldId id="280" r:id="rId8"/>
+    <p:sldId id="276" r:id="rId9"/>
+    <p:sldId id="284" r:id="rId10"/>
+    <p:sldId id="277" r:id="rId11"/>
+    <p:sldId id="283" r:id="rId12"/>
+    <p:sldId id="263" r:id="rId13"/>
+    <p:sldId id="278" r:id="rId14"/>
+    <p:sldId id="265" r:id="rId15"/>
+    <p:sldId id="279" r:id="rId16"/>
+    <p:sldId id="268" r:id="rId17"/>
+    <p:sldId id="269" r:id="rId18"/>
+    <p:sldId id="281" r:id="rId19"/>
+    <p:sldId id="282" r:id="rId20"/>
+    <p:sldId id="264" r:id="rId21"/>
+    <p:sldId id="266" r:id="rId22"/>
+    <p:sldId id="267" r:id="rId23"/>
+    <p:sldId id="273" r:id="rId24"/>
+    <p:sldId id="274" r:id="rId25"/>
+    <p:sldId id="275" r:id="rId26"/>
   </p:sldIdLst>
   <p:sldSz cx="12192000" cy="6858000"/>
   <p:notesSz cx="6858000" cy="9144000"/>
   <p:embeddedFontLst>
     <p:embeddedFont>
       <p:font typeface="Economica" panose="02000506040000020004" pitchFamily="2" charset="77"/>
-      <p:regular r:id="rId27"/>
-      <p:bold r:id="rId28"/>
-      <p:italic r:id="rId29"/>
-      <p:boldItalic r:id="rId30"/>
+      <p:regular r:id="rId28"/>
+      <p:bold r:id="rId29"/>
+      <p:italic r:id="rId30"/>
+      <p:boldItalic r:id="rId31"/>
     </p:embeddedFont>
     <p:embeddedFont>
       <p:font typeface="Quicksand" pitchFamily="2" charset="77"/>
-      <p:regular r:id="rId31"/>
-      <p:bold r:id="rId32"/>
+      <p:regular r:id="rId32"/>
+      <p:bold r:id="rId33"/>
     </p:embeddedFont>
   </p:embeddedFontLst>
   <p:defaultTextStyle>
@@ -283,7 +284,7 @@
       <p15:sldGuideLst xmlns:p15="http://schemas.microsoft.com/office/powerpoint/2012/main"/>
     </p:ext>
     <p:ext uri="http://customooxmlschemas.google.com/">
-      <go:slidesCustomData xmlns:go="http://customooxmlschemas.google.com/" xmlns:ahyp="http://schemas.microsoft.com/office/drawing/2018/hyperlinkcolor" xmlns:p15="http://schemas.microsoft.com/office/powerpoint/2012/main" xmlns:p14="http://schemas.microsoft.com/office/powerpoint/2010/main" xmlns:com="http://schemas.openxmlformats.org/drawingml/2006/compatibility" xmlns:pvml="urn:schemas-microsoft-com:office:powerpoint" xmlns:v="urn:schemas-microsoft-com:vml" xmlns:o="urn:schemas-microsoft-com:office:office" xmlns:dgm="http://schemas.openxmlformats.org/drawingml/2006/diagram" xmlns:c="http://schemas.openxmlformats.org/drawingml/2006/chart" xmlns:mv="urn:schemas-microsoft-com:mac:vml" xmlns:mc="http://schemas.openxmlformats.org/markup-compatibility/2006" xmlns="" r:id="rId33" roundtripDataSignature="AMtx7mhCtrfbZFXRrmv5GpDwfTHlXuLhrw=="/>
+      <go:slidesCustomData xmlns:go="http://customooxmlschemas.google.com/" xmlns:ahyp="http://schemas.microsoft.com/office/drawing/2018/hyperlinkcolor" xmlns:p15="http://schemas.microsoft.com/office/powerpoint/2012/main" xmlns:p14="http://schemas.microsoft.com/office/powerpoint/2010/main" xmlns:com="http://schemas.openxmlformats.org/drawingml/2006/compatibility" xmlns:pvml="urn:schemas-microsoft-com:office:powerpoint" xmlns:v="urn:schemas-microsoft-com:vml" xmlns:o="urn:schemas-microsoft-com:office:office" xmlns:dgm="http://schemas.openxmlformats.org/drawingml/2006/diagram" xmlns:c="http://schemas.openxmlformats.org/drawingml/2006/chart" xmlns:mv="urn:schemas-microsoft-com:mac:vml" xmlns:mc="http://schemas.openxmlformats.org/markup-compatibility/2006" xmlns="" r:id="rId34" roundtripDataSignature="AMtx7mhCtrfbZFXRrmv5GpDwfTHlXuLhrw=="/>
     </p:ext>
   </p:extLst>
 </p:presentation>
@@ -1869,6 +1870,110 @@
   <p:cSld>
     <p:spTree>
       <p:nvGrpSpPr>
+        <p:cNvPr id="1" name="Shape 134"/>
+        <p:cNvGrpSpPr/>
+        <p:nvPr/>
+      </p:nvGrpSpPr>
+      <p:grpSpPr>
+        <a:xfrm>
+          <a:off x="0" y="0"/>
+          <a:ext cx="0" cy="0"/>
+          <a:chOff x="0" y="0"/>
+          <a:chExt cx="0" cy="0"/>
+        </a:xfrm>
+      </p:grpSpPr>
+      <p:sp>
+        <p:nvSpPr>
+          <p:cNvPr id="135" name="Google Shape;135;p7:notes"/>
+          <p:cNvSpPr txBox="1">
+            <a:spLocks noGrp="1"/>
+          </p:cNvSpPr>
+          <p:nvPr>
+            <p:ph type="body" idx="1"/>
+          </p:nvPr>
+        </p:nvSpPr>
+        <p:spPr>
+          <a:xfrm>
+            <a:off x="685800" y="4400550"/>
+            <a:ext cx="5486400" cy="3600450"/>
+          </a:xfrm>
+          <a:prstGeom prst="rect">
+            <a:avLst/>
+          </a:prstGeom>
+        </p:spPr>
+        <p:txBody>
+          <a:bodyPr spcFirstLastPara="1" wrap="square" lIns="91425" tIns="45700" rIns="91425" bIns="45700" anchor="t" anchorCtr="0">
+            <a:noAutofit/>
+          </a:bodyPr>
+          <a:lstStyle/>
+          <a:p>
+            <a:pPr marL="0" lvl="0" indent="0" algn="l" rtl="0">
+              <a:spcBef>
+                <a:spcPts val="0"/>
+              </a:spcBef>
+              <a:spcAft>
+                <a:spcPts val="0"/>
+              </a:spcAft>
+              <a:buNone/>
+            </a:pPr>
+            <a:endParaRPr/>
+          </a:p>
+        </p:txBody>
+      </p:sp>
+      <p:sp>
+        <p:nvSpPr>
+          <p:cNvPr id="136" name="Google Shape;136;p7:notes"/>
+          <p:cNvSpPr>
+            <a:spLocks noGrp="1" noRot="1" noChangeAspect="1"/>
+          </p:cNvSpPr>
+          <p:nvPr>
+            <p:ph type="sldImg" idx="2"/>
+          </p:nvPr>
+        </p:nvSpPr>
+        <p:spPr>
+          <a:xfrm>
+            <a:off x="685800" y="1143000"/>
+            <a:ext cx="5486400" cy="3086100"/>
+          </a:xfrm>
+          <a:custGeom>
+            <a:avLst/>
+            <a:gdLst/>
+            <a:ahLst/>
+            <a:cxnLst/>
+            <a:rect l="l" t="t" r="r" b="b"/>
+            <a:pathLst>
+              <a:path w="120000" h="120000" extrusionOk="0">
+                <a:moveTo>
+                  <a:pt x="0" y="0"/>
+                </a:moveTo>
+                <a:lnTo>
+                  <a:pt x="120000" y="0"/>
+                </a:lnTo>
+                <a:lnTo>
+                  <a:pt x="120000" y="120000"/>
+                </a:lnTo>
+                <a:lnTo>
+                  <a:pt x="0" y="120000"/>
+                </a:lnTo>
+                <a:close/>
+              </a:path>
+            </a:pathLst>
+          </a:custGeom>
+        </p:spPr>
+      </p:sp>
+    </p:spTree>
+  </p:cSld>
+  <p:clrMapOvr>
+    <a:masterClrMapping/>
+  </p:clrMapOvr>
+</p:notes>
+</file>
+
+<file path=ppt/notesSlides/notesSlide11.xml><?xml version="1.0" encoding="utf-8"?>
+<p:notes xmlns:a="http://schemas.openxmlformats.org/drawingml/2006/main" xmlns:r="http://schemas.openxmlformats.org/officeDocument/2006/relationships" xmlns:p="http://schemas.openxmlformats.org/presentationml/2006/main" showMasterSp="0" showMasterPhAnim="0">
+  <p:cSld>
+    <p:spTree>
+      <p:nvGrpSpPr>
         <p:cNvPr id="1" name="Shape 126">
           <a:extLst>
             <a:ext uri="{FF2B5EF4-FFF2-40B4-BE49-F238E27FC236}">
@@ -1991,7 +2096,7 @@
 </p:notes>
 </file>
 
-<file path=ppt/notesSlides/notesSlide11.xml><?xml version="1.0" encoding="utf-8"?>
+<file path=ppt/notesSlides/notesSlide12.xml><?xml version="1.0" encoding="utf-8"?>
 <p:notes xmlns:a="http://schemas.openxmlformats.org/drawingml/2006/main" xmlns:r="http://schemas.openxmlformats.org/officeDocument/2006/relationships" xmlns:p="http://schemas.openxmlformats.org/presentationml/2006/main" showMasterSp="0" showMasterPhAnim="0">
   <p:cSld>
     <p:spTree>
@@ -2095,7 +2200,7 @@
 </p:notes>
 </file>
 
-<file path=ppt/notesSlides/notesSlide12.xml><?xml version="1.0" encoding="utf-8"?>
+<file path=ppt/notesSlides/notesSlide13.xml><?xml version="1.0" encoding="utf-8"?>
 <p:notes xmlns:a="http://schemas.openxmlformats.org/drawingml/2006/main" xmlns:r="http://schemas.openxmlformats.org/officeDocument/2006/relationships" xmlns:p="http://schemas.openxmlformats.org/presentationml/2006/main" showMasterSp="0" showMasterPhAnim="0">
   <p:cSld>
     <p:spTree>
@@ -2231,7 +2336,7 @@
             </a:pPr>
             <a:fld id="{00000000-1234-1234-1234-123412341234}" type="slidenum">
               <a:rPr lang="en-US"/>
-              <a:t>12</a:t>
+              <a:t>13</a:t>
             </a:fld>
             <a:endParaRPr/>
           </a:p>
@@ -2245,7 +2350,7 @@
 </p:notes>
 </file>
 
-<file path=ppt/notesSlides/notesSlide13.xml><?xml version="1.0" encoding="utf-8"?>
+<file path=ppt/notesSlides/notesSlide14.xml><?xml version="1.0" encoding="utf-8"?>
 <p:notes xmlns:a="http://schemas.openxmlformats.org/drawingml/2006/main" xmlns:r="http://schemas.openxmlformats.org/officeDocument/2006/relationships" xmlns:p="http://schemas.openxmlformats.org/presentationml/2006/main" showMasterSp="0" showMasterPhAnim="0">
   <p:cSld>
     <p:spTree>
@@ -2399,7 +2504,7 @@
             </a:pPr>
             <a:fld id="{00000000-1234-1234-1234-123412341234}" type="slidenum">
               <a:rPr lang="en-US"/>
-              <a:t>13</a:t>
+              <a:t>14</a:t>
             </a:fld>
             <a:endParaRPr/>
           </a:p>
@@ -2413,7 +2518,7 @@
 </p:notes>
 </file>
 
-<file path=ppt/notesSlides/notesSlide14.xml><?xml version="1.0" encoding="utf-8"?>
+<file path=ppt/notesSlides/notesSlide15.xml><?xml version="1.0" encoding="utf-8"?>
 <p:notes xmlns:a="http://schemas.openxmlformats.org/drawingml/2006/main" xmlns:r="http://schemas.openxmlformats.org/officeDocument/2006/relationships" xmlns:p="http://schemas.openxmlformats.org/presentationml/2006/main" showMasterSp="0" showMasterPhAnim="0">
   <p:cSld>
     <p:spTree>
@@ -2517,7 +2622,7 @@
 </p:notes>
 </file>
 
-<file path=ppt/notesSlides/notesSlide15.xml><?xml version="1.0" encoding="utf-8"?>
+<file path=ppt/notesSlides/notesSlide16.xml><?xml version="1.0" encoding="utf-8"?>
 <p:notes xmlns:a="http://schemas.openxmlformats.org/drawingml/2006/main" xmlns:r="http://schemas.openxmlformats.org/officeDocument/2006/relationships" xmlns:p="http://schemas.openxmlformats.org/presentationml/2006/main" showMasterSp="0" showMasterPhAnim="0">
   <p:cSld>
     <p:spTree>
@@ -2621,7 +2726,7 @@
 </p:notes>
 </file>
 
-<file path=ppt/notesSlides/notesSlide16.xml><?xml version="1.0" encoding="utf-8"?>
+<file path=ppt/notesSlides/notesSlide17.xml><?xml version="1.0" encoding="utf-8"?>
 <p:notes xmlns:a="http://schemas.openxmlformats.org/drawingml/2006/main" xmlns:r="http://schemas.openxmlformats.org/officeDocument/2006/relationships" xmlns:p="http://schemas.openxmlformats.org/presentationml/2006/main" showMasterSp="0" showMasterPhAnim="0">
   <p:cSld>
     <p:spTree>
@@ -2725,7 +2830,7 @@
 </p:notes>
 </file>
 
-<file path=ppt/notesSlides/notesSlide17.xml><?xml version="1.0" encoding="utf-8"?>
+<file path=ppt/notesSlides/notesSlide18.xml><?xml version="1.0" encoding="utf-8"?>
 <p:notes xmlns:a="http://schemas.openxmlformats.org/drawingml/2006/main" xmlns:r="http://schemas.openxmlformats.org/officeDocument/2006/relationships" xmlns:p="http://schemas.openxmlformats.org/presentationml/2006/main" showMasterSp="0" showMasterPhAnim="0">
   <p:cSld>
     <p:spTree>
@@ -2852,7 +2957,7 @@
 </p:notes>
 </file>
 
-<file path=ppt/notesSlides/notesSlide18.xml><?xml version="1.0" encoding="utf-8"?>
+<file path=ppt/notesSlides/notesSlide19.xml><?xml version="1.0" encoding="utf-8"?>
 <p:notes xmlns:a="http://schemas.openxmlformats.org/drawingml/2006/main" xmlns:r="http://schemas.openxmlformats.org/officeDocument/2006/relationships" xmlns:p="http://schemas.openxmlformats.org/presentationml/2006/main" showMasterSp="0" showMasterPhAnim="0">
   <p:cSld>
     <p:spTree>
@@ -2983,7 +3088,129 @@
 </p:notes>
 </file>
 
-<file path=ppt/notesSlides/notesSlide19.xml><?xml version="1.0" encoding="utf-8"?>
+<file path=ppt/notesSlides/notesSlide2.xml><?xml version="1.0" encoding="utf-8"?>
+<p:notes xmlns:a="http://schemas.openxmlformats.org/drawingml/2006/main" xmlns:r="http://schemas.openxmlformats.org/officeDocument/2006/relationships" xmlns:p="http://schemas.openxmlformats.org/presentationml/2006/main" showMasterSp="0" showMasterPhAnim="0">
+  <p:cSld>
+    <p:spTree>
+      <p:nvGrpSpPr>
+        <p:cNvPr id="1" name="Shape 105"/>
+        <p:cNvGrpSpPr/>
+        <p:nvPr/>
+      </p:nvGrpSpPr>
+      <p:grpSpPr>
+        <a:xfrm>
+          <a:off x="0" y="0"/>
+          <a:ext cx="0" cy="0"/>
+          <a:chOff x="0" y="0"/>
+          <a:chExt cx="0" cy="0"/>
+        </a:xfrm>
+      </p:grpSpPr>
+      <p:sp>
+        <p:nvSpPr>
+          <p:cNvPr id="106" name="Google Shape;106;p2:notes"/>
+          <p:cNvSpPr txBox="1">
+            <a:spLocks noGrp="1"/>
+          </p:cNvSpPr>
+          <p:nvPr>
+            <p:ph type="body" idx="1"/>
+          </p:nvPr>
+        </p:nvSpPr>
+        <p:spPr>
+          <a:xfrm>
+            <a:off x="685800" y="4400550"/>
+            <a:ext cx="5486400" cy="3600450"/>
+          </a:xfrm>
+          <a:prstGeom prst="rect">
+            <a:avLst/>
+          </a:prstGeom>
+          <a:noFill/>
+          <a:ln>
+            <a:noFill/>
+          </a:ln>
+        </p:spPr>
+        <p:txBody>
+          <a:bodyPr spcFirstLastPara="1" wrap="square" lIns="91425" tIns="45700" rIns="91425" bIns="45700" anchor="t" anchorCtr="0">
+            <a:noAutofit/>
+          </a:bodyPr>
+          <a:lstStyle/>
+          <a:p>
+            <a:pPr marL="0" lvl="0" indent="0" algn="l" rtl="0">
+              <a:lnSpc>
+                <a:spcPct val="100000"/>
+              </a:lnSpc>
+              <a:spcBef>
+                <a:spcPts val="0"/>
+              </a:spcBef>
+              <a:spcAft>
+                <a:spcPts val="0"/>
+              </a:spcAft>
+              <a:buSzPts val="1400"/>
+              <a:buNone/>
+            </a:pPr>
+            <a:endParaRPr/>
+          </a:p>
+        </p:txBody>
+      </p:sp>
+      <p:sp>
+        <p:nvSpPr>
+          <p:cNvPr id="107" name="Google Shape;107;p2:notes"/>
+          <p:cNvSpPr>
+            <a:spLocks noGrp="1" noRot="1" noChangeAspect="1"/>
+          </p:cNvSpPr>
+          <p:nvPr>
+            <p:ph type="sldImg" idx="2"/>
+          </p:nvPr>
+        </p:nvSpPr>
+        <p:spPr>
+          <a:xfrm>
+            <a:off x="685800" y="1143000"/>
+            <a:ext cx="5486400" cy="3086100"/>
+          </a:xfrm>
+          <a:custGeom>
+            <a:avLst/>
+            <a:gdLst/>
+            <a:ahLst/>
+            <a:cxnLst/>
+            <a:rect l="l" t="t" r="r" b="b"/>
+            <a:pathLst>
+              <a:path w="120000" h="120000" extrusionOk="0">
+                <a:moveTo>
+                  <a:pt x="0" y="0"/>
+                </a:moveTo>
+                <a:lnTo>
+                  <a:pt x="120000" y="0"/>
+                </a:lnTo>
+                <a:lnTo>
+                  <a:pt x="120000" y="120000"/>
+                </a:lnTo>
+                <a:lnTo>
+                  <a:pt x="0" y="120000"/>
+                </a:lnTo>
+                <a:close/>
+              </a:path>
+            </a:pathLst>
+          </a:custGeom>
+          <a:noFill/>
+          <a:ln w="12700" cap="flat" cmpd="sng">
+            <a:solidFill>
+              <a:srgbClr val="000000"/>
+            </a:solidFill>
+            <a:prstDash val="solid"/>
+            <a:round/>
+            <a:headEnd type="none" w="sm" len="sm"/>
+            <a:tailEnd type="none" w="sm" len="sm"/>
+          </a:ln>
+        </p:spPr>
+      </p:sp>
+    </p:spTree>
+  </p:cSld>
+  <p:clrMapOvr>
+    <a:masterClrMapping/>
+  </p:clrMapOvr>
+</p:notes>
+</file>
+
+<file path=ppt/notesSlides/notesSlide20.xml><?xml version="1.0" encoding="utf-8"?>
 <p:notes xmlns:a="http://schemas.openxmlformats.org/drawingml/2006/main" xmlns:r="http://schemas.openxmlformats.org/officeDocument/2006/relationships" xmlns:p="http://schemas.openxmlformats.org/presentationml/2006/main" showMasterSp="0" showMasterPhAnim="0">
   <p:cSld>
     <p:spTree>
@@ -3145,7 +3372,7 @@
             </a:pPr>
             <a:fld id="{00000000-1234-1234-1234-123412341234}" type="slidenum">
               <a:rPr lang="en-US"/>
-              <a:t>19</a:t>
+              <a:t>20</a:t>
             </a:fld>
             <a:endParaRPr/>
           </a:p>
@@ -3159,129 +3386,7 @@
 </p:notes>
 </file>
 
-<file path=ppt/notesSlides/notesSlide2.xml><?xml version="1.0" encoding="utf-8"?>
-<p:notes xmlns:a="http://schemas.openxmlformats.org/drawingml/2006/main" xmlns:r="http://schemas.openxmlformats.org/officeDocument/2006/relationships" xmlns:p="http://schemas.openxmlformats.org/presentationml/2006/main" showMasterSp="0" showMasterPhAnim="0">
-  <p:cSld>
-    <p:spTree>
-      <p:nvGrpSpPr>
-        <p:cNvPr id="1" name="Shape 105"/>
-        <p:cNvGrpSpPr/>
-        <p:nvPr/>
-      </p:nvGrpSpPr>
-      <p:grpSpPr>
-        <a:xfrm>
-          <a:off x="0" y="0"/>
-          <a:ext cx="0" cy="0"/>
-          <a:chOff x="0" y="0"/>
-          <a:chExt cx="0" cy="0"/>
-        </a:xfrm>
-      </p:grpSpPr>
-      <p:sp>
-        <p:nvSpPr>
-          <p:cNvPr id="106" name="Google Shape;106;p2:notes"/>
-          <p:cNvSpPr txBox="1">
-            <a:spLocks noGrp="1"/>
-          </p:cNvSpPr>
-          <p:nvPr>
-            <p:ph type="body" idx="1"/>
-          </p:nvPr>
-        </p:nvSpPr>
-        <p:spPr>
-          <a:xfrm>
-            <a:off x="685800" y="4400550"/>
-            <a:ext cx="5486400" cy="3600450"/>
-          </a:xfrm>
-          <a:prstGeom prst="rect">
-            <a:avLst/>
-          </a:prstGeom>
-          <a:noFill/>
-          <a:ln>
-            <a:noFill/>
-          </a:ln>
-        </p:spPr>
-        <p:txBody>
-          <a:bodyPr spcFirstLastPara="1" wrap="square" lIns="91425" tIns="45700" rIns="91425" bIns="45700" anchor="t" anchorCtr="0">
-            <a:noAutofit/>
-          </a:bodyPr>
-          <a:lstStyle/>
-          <a:p>
-            <a:pPr marL="0" lvl="0" indent="0" algn="l" rtl="0">
-              <a:lnSpc>
-                <a:spcPct val="100000"/>
-              </a:lnSpc>
-              <a:spcBef>
-                <a:spcPts val="0"/>
-              </a:spcBef>
-              <a:spcAft>
-                <a:spcPts val="0"/>
-              </a:spcAft>
-              <a:buSzPts val="1400"/>
-              <a:buNone/>
-            </a:pPr>
-            <a:endParaRPr/>
-          </a:p>
-        </p:txBody>
-      </p:sp>
-      <p:sp>
-        <p:nvSpPr>
-          <p:cNvPr id="107" name="Google Shape;107;p2:notes"/>
-          <p:cNvSpPr>
-            <a:spLocks noGrp="1" noRot="1" noChangeAspect="1"/>
-          </p:cNvSpPr>
-          <p:nvPr>
-            <p:ph type="sldImg" idx="2"/>
-          </p:nvPr>
-        </p:nvSpPr>
-        <p:spPr>
-          <a:xfrm>
-            <a:off x="685800" y="1143000"/>
-            <a:ext cx="5486400" cy="3086100"/>
-          </a:xfrm>
-          <a:custGeom>
-            <a:avLst/>
-            <a:gdLst/>
-            <a:ahLst/>
-            <a:cxnLst/>
-            <a:rect l="l" t="t" r="r" b="b"/>
-            <a:pathLst>
-              <a:path w="120000" h="120000" extrusionOk="0">
-                <a:moveTo>
-                  <a:pt x="0" y="0"/>
-                </a:moveTo>
-                <a:lnTo>
-                  <a:pt x="120000" y="0"/>
-                </a:lnTo>
-                <a:lnTo>
-                  <a:pt x="120000" y="120000"/>
-                </a:lnTo>
-                <a:lnTo>
-                  <a:pt x="0" y="120000"/>
-                </a:lnTo>
-                <a:close/>
-              </a:path>
-            </a:pathLst>
-          </a:custGeom>
-          <a:noFill/>
-          <a:ln w="12700" cap="flat" cmpd="sng">
-            <a:solidFill>
-              <a:srgbClr val="000000"/>
-            </a:solidFill>
-            <a:prstDash val="solid"/>
-            <a:round/>
-            <a:headEnd type="none" w="sm" len="sm"/>
-            <a:tailEnd type="none" w="sm" len="sm"/>
-          </a:ln>
-        </p:spPr>
-      </p:sp>
-    </p:spTree>
-  </p:cSld>
-  <p:clrMapOvr>
-    <a:masterClrMapping/>
-  </p:clrMapOvr>
-</p:notes>
-</file>
-
-<file path=ppt/notesSlides/notesSlide20.xml><?xml version="1.0" encoding="utf-8"?>
+<file path=ppt/notesSlides/notesSlide21.xml><?xml version="1.0" encoding="utf-8"?>
 <p:notes xmlns:a="http://schemas.openxmlformats.org/drawingml/2006/main" xmlns:r="http://schemas.openxmlformats.org/officeDocument/2006/relationships" xmlns:p="http://schemas.openxmlformats.org/presentationml/2006/main" showMasterSp="0" showMasterPhAnim="0">
   <p:cSld>
     <p:spTree>
@@ -3443,7 +3548,7 @@
             </a:pPr>
             <a:fld id="{00000000-1234-1234-1234-123412341234}" type="slidenum">
               <a:rPr lang="en-US"/>
-              <a:t>20</a:t>
+              <a:t>21</a:t>
             </a:fld>
             <a:endParaRPr/>
           </a:p>
@@ -3457,7 +3562,7 @@
 </p:notes>
 </file>
 
-<file path=ppt/notesSlides/notesSlide21.xml><?xml version="1.0" encoding="utf-8"?>
+<file path=ppt/notesSlides/notesSlide22.xml><?xml version="1.0" encoding="utf-8"?>
 <p:notes xmlns:a="http://schemas.openxmlformats.org/drawingml/2006/main" xmlns:r="http://schemas.openxmlformats.org/officeDocument/2006/relationships" xmlns:p="http://schemas.openxmlformats.org/presentationml/2006/main" showMasterSp="0" showMasterPhAnim="0">
   <p:cSld>
     <p:spTree>
@@ -3615,7 +3720,7 @@
             </a:pPr>
             <a:fld id="{00000000-1234-1234-1234-123412341234}" type="slidenum">
               <a:rPr lang="en-US"/>
-              <a:t>21</a:t>
+              <a:t>22</a:t>
             </a:fld>
             <a:endParaRPr/>
           </a:p>
@@ -3629,7 +3734,7 @@
 </p:notes>
 </file>
 
-<file path=ppt/notesSlides/notesSlide22.xml><?xml version="1.0" encoding="utf-8"?>
+<file path=ppt/notesSlides/notesSlide23.xml><?xml version="1.0" encoding="utf-8"?>
 <p:notes xmlns:a="http://schemas.openxmlformats.org/drawingml/2006/main" xmlns:r="http://schemas.openxmlformats.org/officeDocument/2006/relationships" xmlns:p="http://schemas.openxmlformats.org/presentationml/2006/main" showMasterSp="0" showMasterPhAnim="0">
   <p:cSld>
     <p:spTree>
@@ -3787,7 +3892,7 @@
             </a:pPr>
             <a:fld id="{00000000-1234-1234-1234-123412341234}" type="slidenum">
               <a:rPr lang="en-US"/>
-              <a:t>22</a:t>
+              <a:t>23</a:t>
             </a:fld>
             <a:endParaRPr/>
           </a:p>
@@ -3801,7 +3906,7 @@
 </p:notes>
 </file>
 
-<file path=ppt/notesSlides/notesSlide23.xml><?xml version="1.0" encoding="utf-8"?>
+<file path=ppt/notesSlides/notesSlide24.xml><?xml version="1.0" encoding="utf-8"?>
 <p:notes xmlns:a="http://schemas.openxmlformats.org/drawingml/2006/main" xmlns:r="http://schemas.openxmlformats.org/officeDocument/2006/relationships" xmlns:p="http://schemas.openxmlformats.org/presentationml/2006/main" showMasterSp="0" showMasterPhAnim="0">
   <p:cSld>
     <p:spTree>
@@ -3963,7 +4068,7 @@
             </a:pPr>
             <a:fld id="{00000000-1234-1234-1234-123412341234}" type="slidenum">
               <a:rPr lang="en-US"/>
-              <a:t>23</a:t>
+              <a:t>24</a:t>
             </a:fld>
             <a:endParaRPr/>
           </a:p>
@@ -3977,7 +4082,7 @@
 </p:notes>
 </file>
 
-<file path=ppt/notesSlides/notesSlide24.xml><?xml version="1.0" encoding="utf-8"?>
+<file path=ppt/notesSlides/notesSlide25.xml><?xml version="1.0" encoding="utf-8"?>
 <p:notes xmlns:a="http://schemas.openxmlformats.org/drawingml/2006/main" xmlns:r="http://schemas.openxmlformats.org/officeDocument/2006/relationships" xmlns:p="http://schemas.openxmlformats.org/presentationml/2006/main" showMasterSp="0" showMasterPhAnim="0">
   <p:cSld>
     <p:spTree>
@@ -4135,7 +4240,7 @@
             </a:pPr>
             <a:fld id="{00000000-1234-1234-1234-123412341234}" type="slidenum">
               <a:rPr lang="en-US"/>
-              <a:t>24</a:t>
+              <a:t>25</a:t>
             </a:fld>
             <a:endParaRPr/>
           </a:p>
@@ -4150,6 +4255,151 @@
 </file>
 
 <file path=ppt/notesSlides/notesSlide3.xml><?xml version="1.0" encoding="utf-8"?>
+<p:notes xmlns:a="http://schemas.openxmlformats.org/drawingml/2006/main" xmlns:r="http://schemas.openxmlformats.org/officeDocument/2006/relationships" xmlns:p="http://schemas.openxmlformats.org/presentationml/2006/main" showMasterSp="0" showMasterPhAnim="0">
+  <p:cSld>
+    <p:spTree>
+      <p:nvGrpSpPr>
+        <p:cNvPr id="1" name="Shape 105">
+          <a:extLst>
+            <a:ext uri="{FF2B5EF4-FFF2-40B4-BE49-F238E27FC236}">
+              <a16:creationId xmlns:a16="http://schemas.microsoft.com/office/drawing/2014/main" id="{CE321189-9ABE-B552-A7E7-78570F283A55}"/>
+            </a:ext>
+          </a:extLst>
+        </p:cNvPr>
+        <p:cNvGrpSpPr/>
+        <p:nvPr/>
+      </p:nvGrpSpPr>
+      <p:grpSpPr>
+        <a:xfrm>
+          <a:off x="0" y="0"/>
+          <a:ext cx="0" cy="0"/>
+          <a:chOff x="0" y="0"/>
+          <a:chExt cx="0" cy="0"/>
+        </a:xfrm>
+      </p:grpSpPr>
+      <p:sp>
+        <p:nvSpPr>
+          <p:cNvPr id="106" name="Google Shape;106;p2:notes">
+            <a:extLst>
+              <a:ext uri="{FF2B5EF4-FFF2-40B4-BE49-F238E27FC236}">
+                <a16:creationId xmlns:a16="http://schemas.microsoft.com/office/drawing/2014/main" id="{697FB504-360F-A53D-F9EF-E40AA5D154D9}"/>
+              </a:ext>
+            </a:extLst>
+          </p:cNvPr>
+          <p:cNvSpPr txBox="1">
+            <a:spLocks noGrp="1"/>
+          </p:cNvSpPr>
+          <p:nvPr>
+            <p:ph type="body" idx="1"/>
+          </p:nvPr>
+        </p:nvSpPr>
+        <p:spPr>
+          <a:xfrm>
+            <a:off x="685800" y="4400550"/>
+            <a:ext cx="5486400" cy="3600450"/>
+          </a:xfrm>
+          <a:prstGeom prst="rect">
+            <a:avLst/>
+          </a:prstGeom>
+          <a:noFill/>
+          <a:ln>
+            <a:noFill/>
+          </a:ln>
+        </p:spPr>
+        <p:txBody>
+          <a:bodyPr spcFirstLastPara="1" wrap="square" lIns="91425" tIns="45700" rIns="91425" bIns="45700" anchor="t" anchorCtr="0">
+            <a:noAutofit/>
+          </a:bodyPr>
+          <a:lstStyle/>
+          <a:p>
+            <a:pPr marL="0" lvl="0" indent="0" algn="l" rtl="0">
+              <a:lnSpc>
+                <a:spcPct val="100000"/>
+              </a:lnSpc>
+              <a:spcBef>
+                <a:spcPts val="0"/>
+              </a:spcBef>
+              <a:spcAft>
+                <a:spcPts val="0"/>
+              </a:spcAft>
+              <a:buSzPts val="1400"/>
+              <a:buNone/>
+            </a:pPr>
+            <a:endParaRPr/>
+          </a:p>
+        </p:txBody>
+      </p:sp>
+      <p:sp>
+        <p:nvSpPr>
+          <p:cNvPr id="107" name="Google Shape;107;p2:notes">
+            <a:extLst>
+              <a:ext uri="{FF2B5EF4-FFF2-40B4-BE49-F238E27FC236}">
+                <a16:creationId xmlns:a16="http://schemas.microsoft.com/office/drawing/2014/main" id="{730C725E-1857-7053-D954-FFF931AA93DA}"/>
+              </a:ext>
+            </a:extLst>
+          </p:cNvPr>
+          <p:cNvSpPr>
+            <a:spLocks noGrp="1" noRot="1" noChangeAspect="1"/>
+          </p:cNvSpPr>
+          <p:nvPr>
+            <p:ph type="sldImg" idx="2"/>
+          </p:nvPr>
+        </p:nvSpPr>
+        <p:spPr>
+          <a:xfrm>
+            <a:off x="685800" y="1143000"/>
+            <a:ext cx="5486400" cy="3086100"/>
+          </a:xfrm>
+          <a:custGeom>
+            <a:avLst/>
+            <a:gdLst/>
+            <a:ahLst/>
+            <a:cxnLst/>
+            <a:rect l="l" t="t" r="r" b="b"/>
+            <a:pathLst>
+              <a:path w="120000" h="120000" extrusionOk="0">
+                <a:moveTo>
+                  <a:pt x="0" y="0"/>
+                </a:moveTo>
+                <a:lnTo>
+                  <a:pt x="120000" y="0"/>
+                </a:lnTo>
+                <a:lnTo>
+                  <a:pt x="120000" y="120000"/>
+                </a:lnTo>
+                <a:lnTo>
+                  <a:pt x="0" y="120000"/>
+                </a:lnTo>
+                <a:close/>
+              </a:path>
+            </a:pathLst>
+          </a:custGeom>
+          <a:noFill/>
+          <a:ln w="12700" cap="flat" cmpd="sng">
+            <a:solidFill>
+              <a:srgbClr val="000000"/>
+            </a:solidFill>
+            <a:prstDash val="solid"/>
+            <a:round/>
+            <a:headEnd type="none" w="sm" len="sm"/>
+            <a:tailEnd type="none" w="sm" len="sm"/>
+          </a:ln>
+        </p:spPr>
+      </p:sp>
+    </p:spTree>
+    <p:extLst>
+      <p:ext uri="{BB962C8B-B14F-4D97-AF65-F5344CB8AC3E}">
+        <p14:creationId xmlns:p14="http://schemas.microsoft.com/office/powerpoint/2010/main" val="4099615556"/>
+      </p:ext>
+    </p:extLst>
+  </p:cSld>
+  <p:clrMapOvr>
+    <a:masterClrMapping/>
+  </p:clrMapOvr>
+</p:notes>
+</file>
+
+<file path=ppt/notesSlides/notesSlide4.xml><?xml version="1.0" encoding="utf-8"?>
 <p:notes xmlns:a="http://schemas.openxmlformats.org/drawingml/2006/main" xmlns:r="http://schemas.openxmlformats.org/officeDocument/2006/relationships" xmlns:p="http://schemas.openxmlformats.org/presentationml/2006/main" showMasterSp="0" showMasterPhAnim="0">
   <p:cSld>
     <p:spTree>
@@ -4271,7 +4521,7 @@
 </p:notes>
 </file>
 
-<file path=ppt/notesSlides/notesSlide4.xml><?xml version="1.0" encoding="utf-8"?>
+<file path=ppt/notesSlides/notesSlide5.xml><?xml version="1.0" encoding="utf-8"?>
 <p:notes xmlns:a="http://schemas.openxmlformats.org/drawingml/2006/main" xmlns:r="http://schemas.openxmlformats.org/officeDocument/2006/relationships" xmlns:p="http://schemas.openxmlformats.org/presentationml/2006/main" showMasterSp="0" showMasterPhAnim="0">
   <p:cSld>
     <p:spTree>
@@ -4393,7 +4643,7 @@
 </p:notes>
 </file>
 
-<file path=ppt/notesSlides/notesSlide5.xml><?xml version="1.0" encoding="utf-8"?>
+<file path=ppt/notesSlides/notesSlide6.xml><?xml version="1.0" encoding="utf-8"?>
 <p:notes xmlns:a="http://schemas.openxmlformats.org/drawingml/2006/main" xmlns:r="http://schemas.openxmlformats.org/officeDocument/2006/relationships" xmlns:p="http://schemas.openxmlformats.org/presentationml/2006/main" showMasterSp="0" showMasterPhAnim="0">
   <p:cSld>
     <p:spTree>
@@ -4602,7 +4852,7 @@
 </p:notes>
 </file>
 
-<file path=ppt/notesSlides/notesSlide6.xml><?xml version="1.0" encoding="utf-8"?>
+<file path=ppt/notesSlides/notesSlide7.xml><?xml version="1.0" encoding="utf-8"?>
 <p:notes xmlns:a="http://schemas.openxmlformats.org/drawingml/2006/main" xmlns:r="http://schemas.openxmlformats.org/officeDocument/2006/relationships" xmlns:p="http://schemas.openxmlformats.org/presentationml/2006/main" showMasterSp="0" showMasterPhAnim="0">
   <p:cSld>
     <p:spTree>
@@ -4706,7 +4956,7 @@
 </p:notes>
 </file>
 
-<file path=ppt/notesSlides/notesSlide7.xml><?xml version="1.0" encoding="utf-8"?>
+<file path=ppt/notesSlides/notesSlide8.xml><?xml version="1.0" encoding="utf-8"?>
 <p:notes xmlns:a="http://schemas.openxmlformats.org/drawingml/2006/main" xmlns:r="http://schemas.openxmlformats.org/officeDocument/2006/relationships" xmlns:p="http://schemas.openxmlformats.org/presentationml/2006/main" showMasterSp="0" showMasterPhAnim="0">
   <p:cSld>
     <p:spTree>
@@ -4814,7 +5064,7 @@
 </p:notes>
 </file>
 
-<file path=ppt/notesSlides/notesSlide8.xml><?xml version="1.0" encoding="utf-8"?>
+<file path=ppt/notesSlides/notesSlide9.xml><?xml version="1.0" encoding="utf-8"?>
 <p:notes xmlns:a="http://schemas.openxmlformats.org/drawingml/2006/main" xmlns:r="http://schemas.openxmlformats.org/officeDocument/2006/relationships" xmlns:p="http://schemas.openxmlformats.org/presentationml/2006/main" showMasterSp="0" showMasterPhAnim="0">
   <p:cSld>
     <p:spTree>
@@ -4938,110 +5188,6 @@
         <p14:creationId xmlns:p14="http://schemas.microsoft.com/office/powerpoint/2010/main" val="471956644"/>
       </p:ext>
     </p:extLst>
-  </p:cSld>
-  <p:clrMapOvr>
-    <a:masterClrMapping/>
-  </p:clrMapOvr>
-</p:notes>
-</file>
-
-<file path=ppt/notesSlides/notesSlide9.xml><?xml version="1.0" encoding="utf-8"?>
-<p:notes xmlns:a="http://schemas.openxmlformats.org/drawingml/2006/main" xmlns:r="http://schemas.openxmlformats.org/officeDocument/2006/relationships" xmlns:p="http://schemas.openxmlformats.org/presentationml/2006/main" showMasterSp="0" showMasterPhAnim="0">
-  <p:cSld>
-    <p:spTree>
-      <p:nvGrpSpPr>
-        <p:cNvPr id="1" name="Shape 134"/>
-        <p:cNvGrpSpPr/>
-        <p:nvPr/>
-      </p:nvGrpSpPr>
-      <p:grpSpPr>
-        <a:xfrm>
-          <a:off x="0" y="0"/>
-          <a:ext cx="0" cy="0"/>
-          <a:chOff x="0" y="0"/>
-          <a:chExt cx="0" cy="0"/>
-        </a:xfrm>
-      </p:grpSpPr>
-      <p:sp>
-        <p:nvSpPr>
-          <p:cNvPr id="135" name="Google Shape;135;p7:notes"/>
-          <p:cNvSpPr txBox="1">
-            <a:spLocks noGrp="1"/>
-          </p:cNvSpPr>
-          <p:nvPr>
-            <p:ph type="body" idx="1"/>
-          </p:nvPr>
-        </p:nvSpPr>
-        <p:spPr>
-          <a:xfrm>
-            <a:off x="685800" y="4400550"/>
-            <a:ext cx="5486400" cy="3600450"/>
-          </a:xfrm>
-          <a:prstGeom prst="rect">
-            <a:avLst/>
-          </a:prstGeom>
-        </p:spPr>
-        <p:txBody>
-          <a:bodyPr spcFirstLastPara="1" wrap="square" lIns="91425" tIns="45700" rIns="91425" bIns="45700" anchor="t" anchorCtr="0">
-            <a:noAutofit/>
-          </a:bodyPr>
-          <a:lstStyle/>
-          <a:p>
-            <a:pPr marL="0" lvl="0" indent="0" algn="l" rtl="0">
-              <a:spcBef>
-                <a:spcPts val="0"/>
-              </a:spcBef>
-              <a:spcAft>
-                <a:spcPts val="0"/>
-              </a:spcAft>
-              <a:buNone/>
-            </a:pPr>
-            <a:endParaRPr/>
-          </a:p>
-        </p:txBody>
-      </p:sp>
-      <p:sp>
-        <p:nvSpPr>
-          <p:cNvPr id="136" name="Google Shape;136;p7:notes"/>
-          <p:cNvSpPr>
-            <a:spLocks noGrp="1" noRot="1" noChangeAspect="1"/>
-          </p:cNvSpPr>
-          <p:nvPr>
-            <p:ph type="sldImg" idx="2"/>
-          </p:nvPr>
-        </p:nvSpPr>
-        <p:spPr>
-          <a:xfrm>
-            <a:off x="685800" y="1143000"/>
-            <a:ext cx="5486400" cy="3086100"/>
-          </a:xfrm>
-          <a:custGeom>
-            <a:avLst/>
-            <a:gdLst/>
-            <a:ahLst/>
-            <a:cxnLst/>
-            <a:rect l="l" t="t" r="r" b="b"/>
-            <a:pathLst>
-              <a:path w="120000" h="120000" extrusionOk="0">
-                <a:moveTo>
-                  <a:pt x="0" y="0"/>
-                </a:moveTo>
-                <a:lnTo>
-                  <a:pt x="120000" y="0"/>
-                </a:lnTo>
-                <a:lnTo>
-                  <a:pt x="120000" y="120000"/>
-                </a:lnTo>
-                <a:lnTo>
-                  <a:pt x="0" y="120000"/>
-                </a:lnTo>
-                <a:close/>
-              </a:path>
-            </a:pathLst>
-          </a:custGeom>
-        </p:spPr>
-      </p:sp>
-    </p:spTree>
   </p:cSld>
   <p:clrMapOvr>
     <a:masterClrMapping/>
@@ -18551,6 +18697,289 @@
   <p:cSld>
     <p:spTree>
       <p:nvGrpSpPr>
+        <p:cNvPr id="1" name="Shape 137"/>
+        <p:cNvGrpSpPr/>
+        <p:nvPr/>
+      </p:nvGrpSpPr>
+      <p:grpSpPr>
+        <a:xfrm>
+          <a:off x="0" y="0"/>
+          <a:ext cx="0" cy="0"/>
+          <a:chOff x="0" y="0"/>
+          <a:chExt cx="0" cy="0"/>
+        </a:xfrm>
+      </p:grpSpPr>
+      <p:sp>
+        <p:nvSpPr>
+          <p:cNvPr id="138" name="Google Shape;138;p7"/>
+          <p:cNvSpPr txBox="1"/>
+          <p:nvPr/>
+        </p:nvSpPr>
+        <p:spPr>
+          <a:xfrm>
+            <a:off x="2155062" y="658976"/>
+            <a:ext cx="7881869" cy="923289"/>
+          </a:xfrm>
+          <a:prstGeom prst="rect">
+            <a:avLst/>
+          </a:prstGeom>
+          <a:noFill/>
+          <a:ln>
+            <a:noFill/>
+          </a:ln>
+        </p:spPr>
+        <p:txBody>
+          <a:bodyPr spcFirstLastPara="1" wrap="square" lIns="91425" tIns="45700" rIns="91425" bIns="45700" anchor="t" anchorCtr="0">
+            <a:spAutoFit/>
+          </a:bodyPr>
+          <a:lstStyle/>
+          <a:p>
+            <a:pPr marL="0" marR="0" lvl="0" indent="0" algn="ctr" rtl="0">
+              <a:spcBef>
+                <a:spcPts val="0"/>
+              </a:spcBef>
+              <a:spcAft>
+                <a:spcPts val="0"/>
+              </a:spcAft>
+              <a:buNone/>
+            </a:pPr>
+            <a:r>
+              <a:rPr lang="en-US" sz="5400" dirty="0">
+                <a:solidFill>
+                  <a:schemeClr val="dk1"/>
+                </a:solidFill>
+                <a:latin typeface="Economica"/>
+                <a:ea typeface="Economica"/>
+                <a:cs typeface="Economica"/>
+                <a:sym typeface="Economica"/>
+              </a:rPr>
+              <a:t>‘Recurrent’ Neural Network (RNN)</a:t>
+            </a:r>
+            <a:endParaRPr dirty="0"/>
+          </a:p>
+        </p:txBody>
+      </p:sp>
+      <p:sp>
+        <p:nvSpPr>
+          <p:cNvPr id="139" name="Google Shape;139;p7"/>
+          <p:cNvSpPr txBox="1"/>
+          <p:nvPr/>
+        </p:nvSpPr>
+        <p:spPr>
+          <a:xfrm>
+            <a:off x="890337" y="1861226"/>
+            <a:ext cx="10016362" cy="1508065"/>
+          </a:xfrm>
+          <a:prstGeom prst="rect">
+            <a:avLst/>
+          </a:prstGeom>
+          <a:noFill/>
+          <a:ln>
+            <a:noFill/>
+          </a:ln>
+        </p:spPr>
+        <p:txBody>
+          <a:bodyPr spcFirstLastPara="1" wrap="square" lIns="91425" tIns="45700" rIns="91425" bIns="45700" anchor="t" anchorCtr="0">
+            <a:spAutoFit/>
+          </a:bodyPr>
+          <a:lstStyle/>
+          <a:p>
+            <a:pPr marL="0" marR="0" lvl="0" indent="0" algn="l" rtl="0">
+              <a:spcBef>
+                <a:spcPts val="0"/>
+              </a:spcBef>
+              <a:spcAft>
+                <a:spcPts val="0"/>
+              </a:spcAft>
+              <a:buNone/>
+            </a:pPr>
+            <a:r>
+              <a:rPr lang="en-US" sz="2000" b="1" dirty="0" err="1">
+                <a:solidFill>
+                  <a:schemeClr val="dk1"/>
+                </a:solidFill>
+                <a:latin typeface="Quicksand"/>
+                <a:ea typeface="Quicksand"/>
+                <a:cs typeface="Quicksand"/>
+                <a:sym typeface="Quicksand"/>
+              </a:rPr>
+              <a:t>Keras</a:t>
+            </a:r>
+            <a:r>
+              <a:rPr lang="en-US" sz="2000" b="1" dirty="0">
+                <a:solidFill>
+                  <a:schemeClr val="dk1"/>
+                </a:solidFill>
+                <a:latin typeface="Quicksand"/>
+                <a:ea typeface="Quicksand"/>
+                <a:cs typeface="Quicksand"/>
+                <a:sym typeface="Quicksand"/>
+              </a:rPr>
+              <a:t> Layer </a:t>
+            </a:r>
+            <a:r>
+              <a:rPr lang="en-US" sz="2000" b="1" dirty="0" err="1">
+                <a:solidFill>
+                  <a:schemeClr val="dk1"/>
+                </a:solidFill>
+                <a:latin typeface="Quicksand"/>
+                <a:ea typeface="Quicksand"/>
+                <a:cs typeface="Quicksand"/>
+                <a:sym typeface="Quicksand"/>
+              </a:rPr>
+              <a:t>SimpleRNN</a:t>
+            </a:r>
+            <a:endParaRPr sz="2000" b="1" dirty="0">
+              <a:solidFill>
+                <a:schemeClr val="dk1"/>
+              </a:solidFill>
+              <a:latin typeface="Quicksand"/>
+              <a:ea typeface="Quicksand"/>
+              <a:cs typeface="Quicksand"/>
+              <a:sym typeface="Quicksand"/>
+            </a:endParaRPr>
+          </a:p>
+          <a:p>
+            <a:pPr marL="285750" marR="0" lvl="0" indent="-285750" algn="l" rtl="0">
+              <a:spcBef>
+                <a:spcPts val="0"/>
+              </a:spcBef>
+              <a:spcAft>
+                <a:spcPts val="0"/>
+              </a:spcAft>
+              <a:buClr>
+                <a:schemeClr val="dk1"/>
+              </a:buClr>
+              <a:buSzPts val="1800"/>
+              <a:buFont typeface="Arial"/>
+              <a:buChar char="•"/>
+            </a:pPr>
+            <a:r>
+              <a:rPr lang="en-US" sz="1800" dirty="0">
+                <a:solidFill>
+                  <a:schemeClr val="dk1"/>
+                </a:solidFill>
+                <a:latin typeface="Calibri"/>
+                <a:ea typeface="Calibri"/>
+                <a:cs typeface="Calibri"/>
+                <a:sym typeface="Calibri"/>
+              </a:rPr>
+              <a:t>It’s a Dense layer that processes input token by token, with a feedback loop.</a:t>
+            </a:r>
+            <a:endParaRPr dirty="0"/>
+          </a:p>
+          <a:p>
+            <a:pPr marL="285750" lvl="0" indent="-285750">
+              <a:buClr>
+                <a:schemeClr val="dk1"/>
+              </a:buClr>
+              <a:buSzPts val="1800"/>
+              <a:buFont typeface="Arial"/>
+              <a:buChar char="•"/>
+            </a:pPr>
+            <a:r>
+              <a:rPr lang="en-US" sz="1800" dirty="0">
+                <a:solidFill>
+                  <a:schemeClr val="dk1"/>
+                </a:solidFill>
+                <a:latin typeface="Calibri"/>
+                <a:ea typeface="Calibri"/>
+                <a:cs typeface="Calibri"/>
+                <a:sym typeface="Calibri"/>
+              </a:rPr>
+              <a:t>The inputs are arranged to interact with one another based on their temporal sequencing in the data.</a:t>
+            </a:r>
+            <a:endParaRPr dirty="0"/>
+          </a:p>
+          <a:p>
+            <a:pPr marL="285750" lvl="0" indent="-285750">
+              <a:buClr>
+                <a:schemeClr val="dk1"/>
+              </a:buClr>
+              <a:buSzPts val="1800"/>
+              <a:buFont typeface="Arial"/>
+              <a:buChar char="•"/>
+            </a:pPr>
+            <a:r>
+              <a:rPr lang="en-US" sz="1800" dirty="0">
+                <a:solidFill>
+                  <a:schemeClr val="dk1"/>
+                </a:solidFill>
+                <a:latin typeface="Calibri"/>
+                <a:ea typeface="Calibri"/>
+                <a:cs typeface="Calibri"/>
+                <a:sym typeface="Calibri"/>
+              </a:rPr>
+              <a:t>In practice, we cannot use </a:t>
+            </a:r>
+            <a:r>
+              <a:rPr lang="en-US" sz="1800" dirty="0" err="1">
+                <a:solidFill>
+                  <a:schemeClr val="dk1"/>
+                </a:solidFill>
+                <a:latin typeface="Calibri"/>
+                <a:ea typeface="Calibri"/>
+                <a:cs typeface="Calibri"/>
+                <a:sym typeface="Calibri"/>
+              </a:rPr>
+              <a:t>SimpleRNNs</a:t>
+            </a:r>
+            <a:r>
+              <a:rPr lang="en-US" sz="1800" dirty="0">
+                <a:solidFill>
+                  <a:schemeClr val="dk1"/>
+                </a:solidFill>
+                <a:latin typeface="Calibri"/>
+                <a:ea typeface="Calibri"/>
+                <a:cs typeface="Calibri"/>
+                <a:sym typeface="Calibri"/>
+              </a:rPr>
+              <a:t> to achieve meaningful memory (vanishing gradients arise very quickly! Can you see why?).</a:t>
+            </a:r>
+            <a:endParaRPr dirty="0"/>
+          </a:p>
+        </p:txBody>
+      </p:sp>
+      <p:pic>
+        <p:nvPicPr>
+          <p:cNvPr id="140" name="Google Shape;140;p7"/>
+          <p:cNvPicPr preferRelativeResize="0"/>
+          <p:nvPr/>
+        </p:nvPicPr>
+        <p:blipFill rotWithShape="1">
+          <a:blip r:embed="rId3">
+            <a:alphaModFix/>
+          </a:blip>
+          <a:srcRect/>
+          <a:stretch/>
+        </p:blipFill>
+        <p:spPr>
+          <a:xfrm>
+            <a:off x="1804103" y="3684058"/>
+            <a:ext cx="8583789" cy="2258892"/>
+          </a:xfrm>
+          <a:prstGeom prst="rect">
+            <a:avLst/>
+          </a:prstGeom>
+          <a:noFill/>
+          <a:ln>
+            <a:noFill/>
+          </a:ln>
+        </p:spPr>
+      </p:pic>
+    </p:spTree>
+  </p:cSld>
+  <p:clrMapOvr>
+    <a:masterClrMapping/>
+  </p:clrMapOvr>
+</p:sld>
+</file>
+
+<file path=ppt/slides/slide11.xml><?xml version="1.0" encoding="utf-8"?>
+<p:sld xmlns:a="http://schemas.openxmlformats.org/drawingml/2006/main" xmlns:r="http://schemas.openxmlformats.org/officeDocument/2006/relationships" xmlns:p="http://schemas.openxmlformats.org/presentationml/2006/main">
+  <p:cSld>
+    <p:spTree>
+      <p:nvGrpSpPr>
         <p:cNvPr id="1" name="Shape 129">
           <a:extLst>
             <a:ext uri="{FF2B5EF4-FFF2-40B4-BE49-F238E27FC236}">
@@ -18789,7 +19218,7 @@
 </p:sld>
 </file>
 
-<file path=ppt/slides/slide11.xml><?xml version="1.0" encoding="utf-8"?>
+<file path=ppt/slides/slide12.xml><?xml version="1.0" encoding="utf-8"?>
 <p:sld xmlns:a="http://schemas.openxmlformats.org/drawingml/2006/main" xmlns:r="http://schemas.openxmlformats.org/officeDocument/2006/relationships" xmlns:p="http://schemas.openxmlformats.org/presentationml/2006/main">
   <p:cSld>
     <p:spTree>
@@ -19019,7 +19448,7 @@
 </p:sld>
 </file>
 
-<file path=ppt/slides/slide12.xml><?xml version="1.0" encoding="utf-8"?>
+<file path=ppt/slides/slide13.xml><?xml version="1.0" encoding="utf-8"?>
 <p:sld xmlns:a="http://schemas.openxmlformats.org/drawingml/2006/main" xmlns:r="http://schemas.openxmlformats.org/officeDocument/2006/relationships" xmlns:p="http://schemas.openxmlformats.org/presentationml/2006/main">
   <p:cSld>
     <p:spTree>
@@ -19051,7 +19480,7 @@
         </p:blipFill>
         <p:spPr>
           <a:xfrm>
-            <a:off x="2229614" y="299076"/>
+            <a:off x="2229614" y="311955"/>
             <a:ext cx="7478151" cy="6558926"/>
           </a:xfrm>
           <a:prstGeom prst="rect">
@@ -19071,7 +19500,7 @@
 </p:sld>
 </file>
 
-<file path=ppt/slides/slide13.xml><?xml version="1.0" encoding="utf-8"?>
+<file path=ppt/slides/slide14.xml><?xml version="1.0" encoding="utf-8"?>
 <p:sld xmlns:a="http://schemas.openxmlformats.org/drawingml/2006/main" xmlns:r="http://schemas.openxmlformats.org/officeDocument/2006/relationships" xmlns:p="http://schemas.openxmlformats.org/presentationml/2006/main">
   <p:cSld>
     <p:spTree>
@@ -19223,7 +19652,7 @@
 </p:sld>
 </file>
 
-<file path=ppt/slides/slide14.xml><?xml version="1.0" encoding="utf-8"?>
+<file path=ppt/slides/slide15.xml><?xml version="1.0" encoding="utf-8"?>
 <p:sld xmlns:a="http://schemas.openxmlformats.org/drawingml/2006/main" xmlns:r="http://schemas.openxmlformats.org/officeDocument/2006/relationships" xmlns:p="http://schemas.openxmlformats.org/presentationml/2006/main">
   <p:cSld>
     <p:spTree>
@@ -19489,7 +19918,7 @@
 </p:sld>
 </file>
 
-<file path=ppt/slides/slide15.xml><?xml version="1.0" encoding="utf-8"?>
+<file path=ppt/slides/slide16.xml><?xml version="1.0" encoding="utf-8"?>
 <p:sld xmlns:a="http://schemas.openxmlformats.org/drawingml/2006/main" xmlns:r="http://schemas.openxmlformats.org/officeDocument/2006/relationships" xmlns:p="http://schemas.openxmlformats.org/presentationml/2006/main">
   <p:cSld>
     <p:spTree>
@@ -19670,7 +20099,7 @@
 </p:sld>
 </file>
 
-<file path=ppt/slides/slide16.xml><?xml version="1.0" encoding="utf-8"?>
+<file path=ppt/slides/slide17.xml><?xml version="1.0" encoding="utf-8"?>
 <p:sld xmlns:a="http://schemas.openxmlformats.org/drawingml/2006/main" xmlns:r="http://schemas.openxmlformats.org/officeDocument/2006/relationships" xmlns:p="http://schemas.openxmlformats.org/presentationml/2006/main">
   <p:cSld>
     <p:spTree>
@@ -19880,7 +20309,7 @@
 </p:sld>
 </file>
 
-<file path=ppt/slides/slide17.xml><?xml version="1.0" encoding="utf-8"?>
+<file path=ppt/slides/slide18.xml><?xml version="1.0" encoding="utf-8"?>
 <p:sld xmlns:a="http://schemas.openxmlformats.org/drawingml/2006/main" xmlns:r="http://schemas.openxmlformats.org/officeDocument/2006/relationships" xmlns:p="http://schemas.openxmlformats.org/presentationml/2006/main">
   <p:cSld>
     <p:spTree>
@@ -20125,7 +20554,7 @@
 </p:sld>
 </file>
 
-<file path=ppt/slides/slide18.xml><?xml version="1.0" encoding="utf-8"?>
+<file path=ppt/slides/slide19.xml><?xml version="1.0" encoding="utf-8"?>
 <p:sld xmlns:a="http://schemas.openxmlformats.org/drawingml/2006/main" xmlns:r="http://schemas.openxmlformats.org/officeDocument/2006/relationships" xmlns:p="http://schemas.openxmlformats.org/presentationml/2006/main">
   <p:cSld>
     <p:spTree>
@@ -20403,7 +20832,590 @@
 </p:sld>
 </file>
 
-<file path=ppt/slides/slide19.xml><?xml version="1.0" encoding="utf-8"?>
+<file path=ppt/slides/slide2.xml><?xml version="1.0" encoding="utf-8"?>
+<p:sld xmlns:a="http://schemas.openxmlformats.org/drawingml/2006/main" xmlns:r="http://schemas.openxmlformats.org/officeDocument/2006/relationships" xmlns:p="http://schemas.openxmlformats.org/presentationml/2006/main">
+  <p:cSld>
+    <p:spTree>
+      <p:nvGrpSpPr>
+        <p:cNvPr id="1" name="Shape 108"/>
+        <p:cNvGrpSpPr/>
+        <p:nvPr/>
+      </p:nvGrpSpPr>
+      <p:grpSpPr>
+        <a:xfrm>
+          <a:off x="0" y="0"/>
+          <a:ext cx="0" cy="0"/>
+          <a:chOff x="0" y="0"/>
+          <a:chExt cx="0" cy="0"/>
+        </a:xfrm>
+      </p:grpSpPr>
+      <p:sp>
+        <p:nvSpPr>
+          <p:cNvPr id="109" name="Google Shape;109;p2"/>
+          <p:cNvSpPr txBox="1"/>
+          <p:nvPr/>
+        </p:nvSpPr>
+        <p:spPr>
+          <a:xfrm>
+            <a:off x="2865521" y="586938"/>
+            <a:ext cx="6460957" cy="923330"/>
+          </a:xfrm>
+          <a:prstGeom prst="rect">
+            <a:avLst/>
+          </a:prstGeom>
+          <a:noFill/>
+          <a:ln>
+            <a:noFill/>
+          </a:ln>
+        </p:spPr>
+        <p:txBody>
+          <a:bodyPr spcFirstLastPara="1" wrap="square" lIns="91425" tIns="45700" rIns="91425" bIns="45700" anchor="t" anchorCtr="0">
+            <a:spAutoFit/>
+          </a:bodyPr>
+          <a:lstStyle/>
+          <a:p>
+            <a:pPr marL="0" marR="0" lvl="0" indent="0" algn="ctr" rtl="0">
+              <a:lnSpc>
+                <a:spcPct val="100000"/>
+              </a:lnSpc>
+              <a:spcBef>
+                <a:spcPts val="0"/>
+              </a:spcBef>
+              <a:spcAft>
+                <a:spcPts val="0"/>
+              </a:spcAft>
+              <a:buClr>
+                <a:srgbClr val="000000"/>
+              </a:buClr>
+              <a:buSzPts val="5400"/>
+              <a:buFont typeface="Arial"/>
+              <a:buNone/>
+            </a:pPr>
+            <a:r>
+              <a:rPr lang="en-US" sz="5400" b="0" i="0" u="none" strike="noStrike" cap="none">
+                <a:solidFill>
+                  <a:schemeClr val="dk1"/>
+                </a:solidFill>
+                <a:latin typeface="Economica"/>
+                <a:ea typeface="Economica"/>
+                <a:cs typeface="Economica"/>
+                <a:sym typeface="Economica"/>
+              </a:rPr>
+              <a:t>Today’s Agenda</a:t>
+            </a:r>
+            <a:endParaRPr sz="1400" b="0" i="0" u="none" strike="noStrike" cap="none">
+              <a:solidFill>
+                <a:srgbClr val="000000"/>
+              </a:solidFill>
+              <a:latin typeface="Arial"/>
+              <a:ea typeface="Arial"/>
+              <a:cs typeface="Arial"/>
+              <a:sym typeface="Arial"/>
+            </a:endParaRPr>
+          </a:p>
+        </p:txBody>
+      </p:sp>
+      <p:sp>
+        <p:nvSpPr>
+          <p:cNvPr id="110" name="Google Shape;110;p2"/>
+          <p:cNvSpPr txBox="1"/>
+          <p:nvPr/>
+        </p:nvSpPr>
+        <p:spPr>
+          <a:xfrm>
+            <a:off x="901488" y="2025532"/>
+            <a:ext cx="10016362" cy="3508612"/>
+          </a:xfrm>
+          <a:prstGeom prst="rect">
+            <a:avLst/>
+          </a:prstGeom>
+          <a:noFill/>
+          <a:ln>
+            <a:noFill/>
+          </a:ln>
+        </p:spPr>
+        <p:txBody>
+          <a:bodyPr spcFirstLastPara="1" wrap="square" lIns="91425" tIns="45700" rIns="91425" bIns="45700" anchor="t" anchorCtr="0">
+            <a:spAutoFit/>
+          </a:bodyPr>
+          <a:lstStyle/>
+          <a:p>
+            <a:pPr marL="0" marR="0" lvl="0" indent="0" algn="l" rtl="0">
+              <a:lnSpc>
+                <a:spcPct val="100000"/>
+              </a:lnSpc>
+              <a:spcBef>
+                <a:spcPts val="0"/>
+              </a:spcBef>
+              <a:spcAft>
+                <a:spcPts val="0"/>
+              </a:spcAft>
+              <a:buClr>
+                <a:srgbClr val="000000"/>
+              </a:buClr>
+              <a:buSzPts val="2000"/>
+              <a:buFont typeface="Arial"/>
+              <a:buNone/>
+            </a:pPr>
+            <a:r>
+              <a:rPr lang="en-US" sz="2000" b="1" i="0" u="none" strike="noStrike" cap="none" dirty="0">
+                <a:solidFill>
+                  <a:schemeClr val="dk1"/>
+                </a:solidFill>
+                <a:latin typeface="Quicksand"/>
+                <a:ea typeface="Quicksand"/>
+                <a:cs typeface="Quicksand"/>
+                <a:sym typeface="Quicksand"/>
+              </a:rPr>
+              <a:t>Natural Language Processing (NLP) Concepts</a:t>
+            </a:r>
+            <a:endParaRPr sz="1400" b="0" i="0" u="none" strike="noStrike" cap="none" dirty="0">
+              <a:solidFill>
+                <a:srgbClr val="000000"/>
+              </a:solidFill>
+              <a:latin typeface="Arial"/>
+              <a:ea typeface="Arial"/>
+              <a:cs typeface="Arial"/>
+              <a:sym typeface="Arial"/>
+            </a:endParaRPr>
+          </a:p>
+          <a:p>
+            <a:pPr marL="342900" marR="0" lvl="0" indent="-342900" algn="l" rtl="0">
+              <a:lnSpc>
+                <a:spcPct val="100000"/>
+              </a:lnSpc>
+              <a:spcBef>
+                <a:spcPts val="0"/>
+              </a:spcBef>
+              <a:spcAft>
+                <a:spcPts val="0"/>
+              </a:spcAft>
+              <a:buClr>
+                <a:schemeClr val="dk1"/>
+              </a:buClr>
+              <a:buSzPts val="1800"/>
+              <a:buFont typeface="Arial"/>
+              <a:buChar char="•"/>
+            </a:pPr>
+            <a:r>
+              <a:rPr lang="en-US" sz="1800" b="0" i="0" u="none" strike="noStrike" cap="none" dirty="0">
+                <a:solidFill>
+                  <a:schemeClr val="dk1"/>
+                </a:solidFill>
+                <a:latin typeface="Quicksand"/>
+                <a:ea typeface="Quicksand"/>
+                <a:cs typeface="Quicksand"/>
+                <a:sym typeface="Quicksand"/>
+              </a:rPr>
+              <a:t>Use Cases</a:t>
+            </a:r>
+            <a:endParaRPr sz="1400" b="0" i="0" u="none" strike="noStrike" cap="none" dirty="0">
+              <a:solidFill>
+                <a:srgbClr val="000000"/>
+              </a:solidFill>
+              <a:latin typeface="Arial"/>
+              <a:ea typeface="Arial"/>
+              <a:cs typeface="Arial"/>
+              <a:sym typeface="Arial"/>
+            </a:endParaRPr>
+          </a:p>
+          <a:p>
+            <a:pPr marL="342900" marR="0" lvl="0" indent="-342900" algn="l" rtl="0">
+              <a:lnSpc>
+                <a:spcPct val="100000"/>
+              </a:lnSpc>
+              <a:spcBef>
+                <a:spcPts val="0"/>
+              </a:spcBef>
+              <a:spcAft>
+                <a:spcPts val="0"/>
+              </a:spcAft>
+              <a:buClr>
+                <a:schemeClr val="dk1"/>
+              </a:buClr>
+              <a:buSzPts val="1800"/>
+              <a:buFont typeface="Arial"/>
+              <a:buChar char="•"/>
+            </a:pPr>
+            <a:r>
+              <a:rPr lang="en-US" sz="1800" b="0" i="0" u="none" strike="noStrike" cap="none" dirty="0">
+                <a:solidFill>
+                  <a:schemeClr val="dk1"/>
+                </a:solidFill>
+                <a:latin typeface="Quicksand"/>
+                <a:ea typeface="Quicksand"/>
+                <a:cs typeface="Quicksand"/>
+                <a:sym typeface="Quicksand"/>
+              </a:rPr>
+              <a:t>Quick review on bag of words approaches, etc.</a:t>
+            </a:r>
+            <a:endParaRPr sz="1400" b="0" i="0" u="none" strike="noStrike" cap="none" dirty="0">
+              <a:solidFill>
+                <a:srgbClr val="000000"/>
+              </a:solidFill>
+              <a:latin typeface="Arial"/>
+              <a:ea typeface="Arial"/>
+              <a:cs typeface="Arial"/>
+              <a:sym typeface="Arial"/>
+            </a:endParaRPr>
+          </a:p>
+          <a:p>
+            <a:pPr marL="0" marR="0" lvl="0" indent="0" algn="l" rtl="0">
+              <a:lnSpc>
+                <a:spcPct val="100000"/>
+              </a:lnSpc>
+              <a:spcBef>
+                <a:spcPts val="0"/>
+              </a:spcBef>
+              <a:spcAft>
+                <a:spcPts val="0"/>
+              </a:spcAft>
+              <a:buClr>
+                <a:srgbClr val="000000"/>
+              </a:buClr>
+              <a:buSzPts val="1800"/>
+              <a:buFont typeface="Arial"/>
+              <a:buNone/>
+            </a:pPr>
+            <a:endParaRPr sz="1800" b="1" i="0" u="none" strike="noStrike" cap="none" dirty="0">
+              <a:solidFill>
+                <a:schemeClr val="dk1"/>
+              </a:solidFill>
+              <a:latin typeface="Quicksand"/>
+              <a:ea typeface="Quicksand"/>
+              <a:cs typeface="Quicksand"/>
+              <a:sym typeface="Quicksand"/>
+            </a:endParaRPr>
+          </a:p>
+          <a:p>
+            <a:pPr marL="0" marR="0" lvl="0" indent="0" algn="l" rtl="0">
+              <a:lnSpc>
+                <a:spcPct val="100000"/>
+              </a:lnSpc>
+              <a:spcBef>
+                <a:spcPts val="0"/>
+              </a:spcBef>
+              <a:spcAft>
+                <a:spcPts val="0"/>
+              </a:spcAft>
+              <a:buClr>
+                <a:srgbClr val="000000"/>
+              </a:buClr>
+              <a:buSzPts val="2000"/>
+              <a:buFont typeface="Arial"/>
+              <a:buNone/>
+            </a:pPr>
+            <a:r>
+              <a:rPr lang="en-US" sz="2000" b="1" i="0" u="none" strike="noStrike" cap="none" dirty="0">
+                <a:solidFill>
+                  <a:schemeClr val="dk1"/>
+                </a:solidFill>
+                <a:latin typeface="Quicksand"/>
+                <a:ea typeface="Quicksand"/>
+                <a:cs typeface="Quicksand"/>
+                <a:sym typeface="Quicksand"/>
+              </a:rPr>
+              <a:t>Text Pre-processing Functions / Layers</a:t>
+            </a:r>
+            <a:endParaRPr sz="1400" b="0" i="0" u="none" strike="noStrike" cap="none" dirty="0">
+              <a:solidFill>
+                <a:srgbClr val="000000"/>
+              </a:solidFill>
+              <a:latin typeface="Arial"/>
+              <a:ea typeface="Arial"/>
+              <a:cs typeface="Arial"/>
+              <a:sym typeface="Arial"/>
+            </a:endParaRPr>
+          </a:p>
+          <a:p>
+            <a:pPr marL="342900" marR="0" lvl="0" indent="-342900" algn="l" rtl="0">
+              <a:lnSpc>
+                <a:spcPct val="100000"/>
+              </a:lnSpc>
+              <a:spcBef>
+                <a:spcPts val="0"/>
+              </a:spcBef>
+              <a:spcAft>
+                <a:spcPts val="0"/>
+              </a:spcAft>
+              <a:buClr>
+                <a:schemeClr val="dk1"/>
+              </a:buClr>
+              <a:buSzPts val="1800"/>
+              <a:buFont typeface="Arial"/>
+              <a:buChar char="•"/>
+            </a:pPr>
+            <a:r>
+              <a:rPr lang="en-US" sz="1800" b="0" i="0" u="none" strike="noStrike" cap="none" dirty="0">
+                <a:solidFill>
+                  <a:schemeClr val="dk1"/>
+                </a:solidFill>
+                <a:latin typeface="Quicksand"/>
+                <a:ea typeface="Quicksand"/>
+                <a:cs typeface="Quicksand"/>
+                <a:sym typeface="Quicksand"/>
+              </a:rPr>
+              <a:t>This implements basic standardization and punctuation</a:t>
+            </a:r>
+            <a:br>
+              <a:rPr lang="en-US" sz="1800" b="0" i="0" u="none" strike="noStrike" cap="none" dirty="0">
+                <a:solidFill>
+                  <a:schemeClr val="dk1"/>
+                </a:solidFill>
+                <a:latin typeface="Quicksand"/>
+                <a:ea typeface="Quicksand"/>
+                <a:cs typeface="Quicksand"/>
+                <a:sym typeface="Quicksand"/>
+              </a:rPr>
+            </a:br>
+            <a:r>
+              <a:rPr lang="en-US" sz="1800" b="0" i="0" u="none" strike="noStrike" cap="none" dirty="0">
+                <a:solidFill>
+                  <a:schemeClr val="dk1"/>
+                </a:solidFill>
+                <a:latin typeface="Quicksand"/>
+                <a:ea typeface="Quicksand"/>
+                <a:cs typeface="Quicksand"/>
+                <a:sym typeface="Quicksand"/>
+              </a:rPr>
+              <a:t>removal. It assumes 1-grams, then one-hot encodes.</a:t>
+            </a:r>
+            <a:endParaRPr sz="1400" b="0" i="0" u="none" strike="noStrike" cap="none" dirty="0">
+              <a:solidFill>
+                <a:srgbClr val="000000"/>
+              </a:solidFill>
+              <a:latin typeface="Arial"/>
+              <a:ea typeface="Arial"/>
+              <a:cs typeface="Arial"/>
+              <a:sym typeface="Arial"/>
+            </a:endParaRPr>
+          </a:p>
+          <a:p>
+            <a:pPr marL="342900" marR="0" lvl="0" indent="-342900" algn="l" rtl="0">
+              <a:lnSpc>
+                <a:spcPct val="100000"/>
+              </a:lnSpc>
+              <a:spcBef>
+                <a:spcPts val="0"/>
+              </a:spcBef>
+              <a:spcAft>
+                <a:spcPts val="0"/>
+              </a:spcAft>
+              <a:buClr>
+                <a:schemeClr val="dk1"/>
+              </a:buClr>
+              <a:buSzPts val="1800"/>
+              <a:buFont typeface="Arial"/>
+              <a:buChar char="•"/>
+            </a:pPr>
+            <a:r>
+              <a:rPr lang="en-US" sz="1800" b="0" i="0" u="none" strike="noStrike" cap="none" dirty="0">
+                <a:solidFill>
+                  <a:schemeClr val="dk1"/>
+                </a:solidFill>
+                <a:latin typeface="Quicksand"/>
+                <a:ea typeface="Quicksand"/>
+                <a:cs typeface="Quicksand"/>
+                <a:sym typeface="Quicksand"/>
+              </a:rPr>
+              <a:t>No stemming or stop word removal, by default.</a:t>
+            </a:r>
+            <a:endParaRPr sz="1400" b="0" i="0" u="none" strike="noStrike" cap="none" dirty="0">
+              <a:solidFill>
+                <a:srgbClr val="000000"/>
+              </a:solidFill>
+              <a:latin typeface="Arial"/>
+              <a:ea typeface="Arial"/>
+              <a:cs typeface="Arial"/>
+              <a:sym typeface="Arial"/>
+            </a:endParaRPr>
+          </a:p>
+          <a:p>
+            <a:pPr marL="285750" marR="0" lvl="0" indent="-171450" algn="l" rtl="0">
+              <a:lnSpc>
+                <a:spcPct val="100000"/>
+              </a:lnSpc>
+              <a:spcBef>
+                <a:spcPts val="0"/>
+              </a:spcBef>
+              <a:spcAft>
+                <a:spcPts val="0"/>
+              </a:spcAft>
+              <a:buClr>
+                <a:schemeClr val="dk1"/>
+              </a:buClr>
+              <a:buSzPts val="1800"/>
+              <a:buFont typeface="Arial"/>
+              <a:buNone/>
+            </a:pPr>
+            <a:endParaRPr sz="1800" b="0" i="0" u="none" strike="noStrike" cap="none" dirty="0">
+              <a:solidFill>
+                <a:schemeClr val="dk1"/>
+              </a:solidFill>
+              <a:latin typeface="Calibri"/>
+              <a:ea typeface="Calibri"/>
+              <a:cs typeface="Calibri"/>
+              <a:sym typeface="Calibri"/>
+            </a:endParaRPr>
+          </a:p>
+          <a:p>
+            <a:pPr marL="0" marR="0" lvl="0" indent="0" algn="l" rtl="0">
+              <a:lnSpc>
+                <a:spcPct val="100000"/>
+              </a:lnSpc>
+              <a:spcBef>
+                <a:spcPts val="0"/>
+              </a:spcBef>
+              <a:spcAft>
+                <a:spcPts val="0"/>
+              </a:spcAft>
+              <a:buClr>
+                <a:srgbClr val="000000"/>
+              </a:buClr>
+              <a:buSzPts val="2000"/>
+              <a:buFont typeface="Arial"/>
+              <a:buNone/>
+            </a:pPr>
+            <a:r>
+              <a:rPr lang="en-US" sz="2000" b="1" i="0" u="none" strike="noStrike" cap="none" dirty="0">
+                <a:solidFill>
+                  <a:schemeClr val="dk1"/>
+                </a:solidFill>
+                <a:latin typeface="Quicksand"/>
+                <a:ea typeface="Quicksand"/>
+                <a:cs typeface="Quicksand"/>
+                <a:sym typeface="Quicksand"/>
+              </a:rPr>
+              <a:t>Architectures for Sequence Data</a:t>
+            </a:r>
+            <a:endParaRPr sz="1400" b="0" i="0" u="none" strike="noStrike" cap="none" dirty="0">
+              <a:solidFill>
+                <a:srgbClr val="000000"/>
+              </a:solidFill>
+              <a:latin typeface="Arial"/>
+              <a:ea typeface="Arial"/>
+              <a:cs typeface="Arial"/>
+              <a:sym typeface="Arial"/>
+            </a:endParaRPr>
+          </a:p>
+          <a:p>
+            <a:pPr marL="285750" marR="0" lvl="0" indent="-285750" algn="l" rtl="0">
+              <a:lnSpc>
+                <a:spcPct val="100000"/>
+              </a:lnSpc>
+              <a:spcBef>
+                <a:spcPts val="0"/>
+              </a:spcBef>
+              <a:spcAft>
+                <a:spcPts val="0"/>
+              </a:spcAft>
+              <a:buClr>
+                <a:schemeClr val="dk1"/>
+              </a:buClr>
+              <a:buSzPts val="1800"/>
+              <a:buFont typeface="Arial"/>
+              <a:buChar char="•"/>
+            </a:pPr>
+            <a:r>
+              <a:rPr lang="en-US" sz="1800" dirty="0">
+                <a:solidFill>
+                  <a:schemeClr val="dk1"/>
+                </a:solidFill>
+                <a:latin typeface="Calibri"/>
+                <a:ea typeface="Calibri"/>
+                <a:cs typeface="Calibri"/>
+                <a:sym typeface="Calibri"/>
+              </a:rPr>
+              <a:t>Recurrent Neural Networks (RNNs)</a:t>
+            </a:r>
+            <a:endParaRPr lang="en-US" sz="1800" b="0" i="0" u="none" strike="noStrike" cap="none" dirty="0">
+              <a:solidFill>
+                <a:schemeClr val="dk1"/>
+              </a:solidFill>
+              <a:latin typeface="Calibri"/>
+              <a:ea typeface="Calibri"/>
+              <a:cs typeface="Calibri"/>
+              <a:sym typeface="Calibri"/>
+            </a:endParaRPr>
+          </a:p>
+          <a:p>
+            <a:pPr marL="285750" marR="0" lvl="0" indent="-285750" algn="l" rtl="0">
+              <a:lnSpc>
+                <a:spcPct val="100000"/>
+              </a:lnSpc>
+              <a:spcBef>
+                <a:spcPts val="0"/>
+              </a:spcBef>
+              <a:spcAft>
+                <a:spcPts val="0"/>
+              </a:spcAft>
+              <a:buClr>
+                <a:schemeClr val="dk1"/>
+              </a:buClr>
+              <a:buSzPts val="1800"/>
+              <a:buFont typeface="Arial"/>
+              <a:buChar char="•"/>
+            </a:pPr>
+            <a:r>
+              <a:rPr lang="en-US" sz="1800" b="0" i="0" u="none" strike="noStrike" cap="none" dirty="0">
+                <a:solidFill>
+                  <a:schemeClr val="dk1"/>
+                </a:solidFill>
+                <a:latin typeface="Calibri"/>
+                <a:ea typeface="Calibri"/>
+                <a:cs typeface="Calibri"/>
+                <a:sym typeface="Calibri"/>
+              </a:rPr>
+              <a:t>Bidirectional LSTM</a:t>
+            </a:r>
+            <a:endParaRPr sz="1400" b="0" i="0" u="none" strike="noStrike" cap="none" dirty="0">
+              <a:solidFill>
+                <a:srgbClr val="000000"/>
+              </a:solidFill>
+              <a:latin typeface="Arial"/>
+              <a:ea typeface="Arial"/>
+              <a:cs typeface="Arial"/>
+              <a:sym typeface="Arial"/>
+            </a:endParaRPr>
+          </a:p>
+        </p:txBody>
+      </p:sp>
+      <p:pic>
+        <p:nvPicPr>
+          <p:cNvPr id="111" name="Google Shape;111;p2" descr="Build an Effective Meeting Agenda Template | WorkPatterns"/>
+          <p:cNvPicPr preferRelativeResize="0"/>
+          <p:nvPr/>
+        </p:nvPicPr>
+        <p:blipFill rotWithShape="1">
+          <a:blip r:embed="rId3">
+            <a:alphaModFix/>
+          </a:blip>
+          <a:srcRect/>
+          <a:stretch/>
+        </p:blipFill>
+        <p:spPr>
+          <a:xfrm>
+            <a:off x="6382305" y="2450790"/>
+            <a:ext cx="6434164" cy="3382963"/>
+          </a:xfrm>
+          <a:prstGeom prst="rect">
+            <a:avLst/>
+          </a:prstGeom>
+          <a:noFill/>
+          <a:ln>
+            <a:noFill/>
+          </a:ln>
+        </p:spPr>
+      </p:pic>
+    </p:spTree>
+  </p:cSld>
+  <p:clrMapOvr>
+    <a:masterClrMapping/>
+  </p:clrMapOvr>
+</p:sld>
+</file>
+
+<file path=ppt/slides/slide20.xml><?xml version="1.0" encoding="utf-8"?>
 <p:sld xmlns:a="http://schemas.openxmlformats.org/drawingml/2006/main" xmlns:r="http://schemas.openxmlformats.org/officeDocument/2006/relationships" xmlns:p="http://schemas.openxmlformats.org/presentationml/2006/main">
   <p:cSld>
     <p:spTree>
@@ -20885,590 +21897,7 @@
 </p:sld>
 </file>
 
-<file path=ppt/slides/slide2.xml><?xml version="1.0" encoding="utf-8"?>
-<p:sld xmlns:a="http://schemas.openxmlformats.org/drawingml/2006/main" xmlns:r="http://schemas.openxmlformats.org/officeDocument/2006/relationships" xmlns:p="http://schemas.openxmlformats.org/presentationml/2006/main">
-  <p:cSld>
-    <p:spTree>
-      <p:nvGrpSpPr>
-        <p:cNvPr id="1" name="Shape 108"/>
-        <p:cNvGrpSpPr/>
-        <p:nvPr/>
-      </p:nvGrpSpPr>
-      <p:grpSpPr>
-        <a:xfrm>
-          <a:off x="0" y="0"/>
-          <a:ext cx="0" cy="0"/>
-          <a:chOff x="0" y="0"/>
-          <a:chExt cx="0" cy="0"/>
-        </a:xfrm>
-      </p:grpSpPr>
-      <p:sp>
-        <p:nvSpPr>
-          <p:cNvPr id="109" name="Google Shape;109;p2"/>
-          <p:cNvSpPr txBox="1"/>
-          <p:nvPr/>
-        </p:nvSpPr>
-        <p:spPr>
-          <a:xfrm>
-            <a:off x="2865521" y="586938"/>
-            <a:ext cx="6460957" cy="923330"/>
-          </a:xfrm>
-          <a:prstGeom prst="rect">
-            <a:avLst/>
-          </a:prstGeom>
-          <a:noFill/>
-          <a:ln>
-            <a:noFill/>
-          </a:ln>
-        </p:spPr>
-        <p:txBody>
-          <a:bodyPr spcFirstLastPara="1" wrap="square" lIns="91425" tIns="45700" rIns="91425" bIns="45700" anchor="t" anchorCtr="0">
-            <a:spAutoFit/>
-          </a:bodyPr>
-          <a:lstStyle/>
-          <a:p>
-            <a:pPr marL="0" marR="0" lvl="0" indent="0" algn="ctr" rtl="0">
-              <a:lnSpc>
-                <a:spcPct val="100000"/>
-              </a:lnSpc>
-              <a:spcBef>
-                <a:spcPts val="0"/>
-              </a:spcBef>
-              <a:spcAft>
-                <a:spcPts val="0"/>
-              </a:spcAft>
-              <a:buClr>
-                <a:srgbClr val="000000"/>
-              </a:buClr>
-              <a:buSzPts val="5400"/>
-              <a:buFont typeface="Arial"/>
-              <a:buNone/>
-            </a:pPr>
-            <a:r>
-              <a:rPr lang="en-US" sz="5400" b="0" i="0" u="none" strike="noStrike" cap="none">
-                <a:solidFill>
-                  <a:schemeClr val="dk1"/>
-                </a:solidFill>
-                <a:latin typeface="Economica"/>
-                <a:ea typeface="Economica"/>
-                <a:cs typeface="Economica"/>
-                <a:sym typeface="Economica"/>
-              </a:rPr>
-              <a:t>Today’s Agenda</a:t>
-            </a:r>
-            <a:endParaRPr sz="1400" b="0" i="0" u="none" strike="noStrike" cap="none">
-              <a:solidFill>
-                <a:srgbClr val="000000"/>
-              </a:solidFill>
-              <a:latin typeface="Arial"/>
-              <a:ea typeface="Arial"/>
-              <a:cs typeface="Arial"/>
-              <a:sym typeface="Arial"/>
-            </a:endParaRPr>
-          </a:p>
-        </p:txBody>
-      </p:sp>
-      <p:sp>
-        <p:nvSpPr>
-          <p:cNvPr id="110" name="Google Shape;110;p2"/>
-          <p:cNvSpPr txBox="1"/>
-          <p:nvPr/>
-        </p:nvSpPr>
-        <p:spPr>
-          <a:xfrm>
-            <a:off x="901488" y="2025532"/>
-            <a:ext cx="10016362" cy="3508612"/>
-          </a:xfrm>
-          <a:prstGeom prst="rect">
-            <a:avLst/>
-          </a:prstGeom>
-          <a:noFill/>
-          <a:ln>
-            <a:noFill/>
-          </a:ln>
-        </p:spPr>
-        <p:txBody>
-          <a:bodyPr spcFirstLastPara="1" wrap="square" lIns="91425" tIns="45700" rIns="91425" bIns="45700" anchor="t" anchorCtr="0">
-            <a:spAutoFit/>
-          </a:bodyPr>
-          <a:lstStyle/>
-          <a:p>
-            <a:pPr marL="0" marR="0" lvl="0" indent="0" algn="l" rtl="0">
-              <a:lnSpc>
-                <a:spcPct val="100000"/>
-              </a:lnSpc>
-              <a:spcBef>
-                <a:spcPts val="0"/>
-              </a:spcBef>
-              <a:spcAft>
-                <a:spcPts val="0"/>
-              </a:spcAft>
-              <a:buClr>
-                <a:srgbClr val="000000"/>
-              </a:buClr>
-              <a:buSzPts val="2000"/>
-              <a:buFont typeface="Arial"/>
-              <a:buNone/>
-            </a:pPr>
-            <a:r>
-              <a:rPr lang="en-US" sz="2000" b="1" i="0" u="none" strike="noStrike" cap="none" dirty="0">
-                <a:solidFill>
-                  <a:schemeClr val="dk1"/>
-                </a:solidFill>
-                <a:latin typeface="Quicksand"/>
-                <a:ea typeface="Quicksand"/>
-                <a:cs typeface="Quicksand"/>
-                <a:sym typeface="Quicksand"/>
-              </a:rPr>
-              <a:t>Natural Language Processing (NLP) Concepts</a:t>
-            </a:r>
-            <a:endParaRPr sz="1400" b="0" i="0" u="none" strike="noStrike" cap="none" dirty="0">
-              <a:solidFill>
-                <a:srgbClr val="000000"/>
-              </a:solidFill>
-              <a:latin typeface="Arial"/>
-              <a:ea typeface="Arial"/>
-              <a:cs typeface="Arial"/>
-              <a:sym typeface="Arial"/>
-            </a:endParaRPr>
-          </a:p>
-          <a:p>
-            <a:pPr marL="342900" marR="0" lvl="0" indent="-342900" algn="l" rtl="0">
-              <a:lnSpc>
-                <a:spcPct val="100000"/>
-              </a:lnSpc>
-              <a:spcBef>
-                <a:spcPts val="0"/>
-              </a:spcBef>
-              <a:spcAft>
-                <a:spcPts val="0"/>
-              </a:spcAft>
-              <a:buClr>
-                <a:schemeClr val="dk1"/>
-              </a:buClr>
-              <a:buSzPts val="1800"/>
-              <a:buFont typeface="Arial"/>
-              <a:buChar char="•"/>
-            </a:pPr>
-            <a:r>
-              <a:rPr lang="en-US" sz="1800" b="0" i="0" u="none" strike="noStrike" cap="none" dirty="0">
-                <a:solidFill>
-                  <a:schemeClr val="dk1"/>
-                </a:solidFill>
-                <a:latin typeface="Quicksand"/>
-                <a:ea typeface="Quicksand"/>
-                <a:cs typeface="Quicksand"/>
-                <a:sym typeface="Quicksand"/>
-              </a:rPr>
-              <a:t>Use Cases</a:t>
-            </a:r>
-            <a:endParaRPr sz="1400" b="0" i="0" u="none" strike="noStrike" cap="none" dirty="0">
-              <a:solidFill>
-                <a:srgbClr val="000000"/>
-              </a:solidFill>
-              <a:latin typeface="Arial"/>
-              <a:ea typeface="Arial"/>
-              <a:cs typeface="Arial"/>
-              <a:sym typeface="Arial"/>
-            </a:endParaRPr>
-          </a:p>
-          <a:p>
-            <a:pPr marL="342900" marR="0" lvl="0" indent="-342900" algn="l" rtl="0">
-              <a:lnSpc>
-                <a:spcPct val="100000"/>
-              </a:lnSpc>
-              <a:spcBef>
-                <a:spcPts val="0"/>
-              </a:spcBef>
-              <a:spcAft>
-                <a:spcPts val="0"/>
-              </a:spcAft>
-              <a:buClr>
-                <a:schemeClr val="dk1"/>
-              </a:buClr>
-              <a:buSzPts val="1800"/>
-              <a:buFont typeface="Arial"/>
-              <a:buChar char="•"/>
-            </a:pPr>
-            <a:r>
-              <a:rPr lang="en-US" sz="1800" b="0" i="0" u="none" strike="noStrike" cap="none" dirty="0">
-                <a:solidFill>
-                  <a:schemeClr val="dk1"/>
-                </a:solidFill>
-                <a:latin typeface="Quicksand"/>
-                <a:ea typeface="Quicksand"/>
-                <a:cs typeface="Quicksand"/>
-                <a:sym typeface="Quicksand"/>
-              </a:rPr>
-              <a:t>Quick review on bag of words approaches, etc.</a:t>
-            </a:r>
-            <a:endParaRPr sz="1400" b="0" i="0" u="none" strike="noStrike" cap="none" dirty="0">
-              <a:solidFill>
-                <a:srgbClr val="000000"/>
-              </a:solidFill>
-              <a:latin typeface="Arial"/>
-              <a:ea typeface="Arial"/>
-              <a:cs typeface="Arial"/>
-              <a:sym typeface="Arial"/>
-            </a:endParaRPr>
-          </a:p>
-          <a:p>
-            <a:pPr marL="0" marR="0" lvl="0" indent="0" algn="l" rtl="0">
-              <a:lnSpc>
-                <a:spcPct val="100000"/>
-              </a:lnSpc>
-              <a:spcBef>
-                <a:spcPts val="0"/>
-              </a:spcBef>
-              <a:spcAft>
-                <a:spcPts val="0"/>
-              </a:spcAft>
-              <a:buClr>
-                <a:srgbClr val="000000"/>
-              </a:buClr>
-              <a:buSzPts val="1800"/>
-              <a:buFont typeface="Arial"/>
-              <a:buNone/>
-            </a:pPr>
-            <a:endParaRPr sz="1800" b="1" i="0" u="none" strike="noStrike" cap="none" dirty="0">
-              <a:solidFill>
-                <a:schemeClr val="dk1"/>
-              </a:solidFill>
-              <a:latin typeface="Quicksand"/>
-              <a:ea typeface="Quicksand"/>
-              <a:cs typeface="Quicksand"/>
-              <a:sym typeface="Quicksand"/>
-            </a:endParaRPr>
-          </a:p>
-          <a:p>
-            <a:pPr marL="0" marR="0" lvl="0" indent="0" algn="l" rtl="0">
-              <a:lnSpc>
-                <a:spcPct val="100000"/>
-              </a:lnSpc>
-              <a:spcBef>
-                <a:spcPts val="0"/>
-              </a:spcBef>
-              <a:spcAft>
-                <a:spcPts val="0"/>
-              </a:spcAft>
-              <a:buClr>
-                <a:srgbClr val="000000"/>
-              </a:buClr>
-              <a:buSzPts val="2000"/>
-              <a:buFont typeface="Arial"/>
-              <a:buNone/>
-            </a:pPr>
-            <a:r>
-              <a:rPr lang="en-US" sz="2000" b="1" i="0" u="none" strike="noStrike" cap="none" dirty="0">
-                <a:solidFill>
-                  <a:schemeClr val="dk1"/>
-                </a:solidFill>
-                <a:latin typeface="Quicksand"/>
-                <a:ea typeface="Quicksand"/>
-                <a:cs typeface="Quicksand"/>
-                <a:sym typeface="Quicksand"/>
-              </a:rPr>
-              <a:t>Text Pre-processing Functions / Layers</a:t>
-            </a:r>
-            <a:endParaRPr sz="1400" b="0" i="0" u="none" strike="noStrike" cap="none" dirty="0">
-              <a:solidFill>
-                <a:srgbClr val="000000"/>
-              </a:solidFill>
-              <a:latin typeface="Arial"/>
-              <a:ea typeface="Arial"/>
-              <a:cs typeface="Arial"/>
-              <a:sym typeface="Arial"/>
-            </a:endParaRPr>
-          </a:p>
-          <a:p>
-            <a:pPr marL="342900" marR="0" lvl="0" indent="-342900" algn="l" rtl="0">
-              <a:lnSpc>
-                <a:spcPct val="100000"/>
-              </a:lnSpc>
-              <a:spcBef>
-                <a:spcPts val="0"/>
-              </a:spcBef>
-              <a:spcAft>
-                <a:spcPts val="0"/>
-              </a:spcAft>
-              <a:buClr>
-                <a:schemeClr val="dk1"/>
-              </a:buClr>
-              <a:buSzPts val="1800"/>
-              <a:buFont typeface="Arial"/>
-              <a:buChar char="•"/>
-            </a:pPr>
-            <a:r>
-              <a:rPr lang="en-US" sz="1800" b="0" i="0" u="none" strike="noStrike" cap="none" dirty="0">
-                <a:solidFill>
-                  <a:schemeClr val="dk1"/>
-                </a:solidFill>
-                <a:latin typeface="Quicksand"/>
-                <a:ea typeface="Quicksand"/>
-                <a:cs typeface="Quicksand"/>
-                <a:sym typeface="Quicksand"/>
-              </a:rPr>
-              <a:t>This implements basic standardization and punctuation</a:t>
-            </a:r>
-            <a:br>
-              <a:rPr lang="en-US" sz="1800" b="0" i="0" u="none" strike="noStrike" cap="none" dirty="0">
-                <a:solidFill>
-                  <a:schemeClr val="dk1"/>
-                </a:solidFill>
-                <a:latin typeface="Quicksand"/>
-                <a:ea typeface="Quicksand"/>
-                <a:cs typeface="Quicksand"/>
-                <a:sym typeface="Quicksand"/>
-              </a:rPr>
-            </a:br>
-            <a:r>
-              <a:rPr lang="en-US" sz="1800" b="0" i="0" u="none" strike="noStrike" cap="none" dirty="0">
-                <a:solidFill>
-                  <a:schemeClr val="dk1"/>
-                </a:solidFill>
-                <a:latin typeface="Quicksand"/>
-                <a:ea typeface="Quicksand"/>
-                <a:cs typeface="Quicksand"/>
-                <a:sym typeface="Quicksand"/>
-              </a:rPr>
-              <a:t>removal. It assumes 1-grams, then one-hot encodes.</a:t>
-            </a:r>
-            <a:endParaRPr sz="1400" b="0" i="0" u="none" strike="noStrike" cap="none" dirty="0">
-              <a:solidFill>
-                <a:srgbClr val="000000"/>
-              </a:solidFill>
-              <a:latin typeface="Arial"/>
-              <a:ea typeface="Arial"/>
-              <a:cs typeface="Arial"/>
-              <a:sym typeface="Arial"/>
-            </a:endParaRPr>
-          </a:p>
-          <a:p>
-            <a:pPr marL="342900" marR="0" lvl="0" indent="-342900" algn="l" rtl="0">
-              <a:lnSpc>
-                <a:spcPct val="100000"/>
-              </a:lnSpc>
-              <a:spcBef>
-                <a:spcPts val="0"/>
-              </a:spcBef>
-              <a:spcAft>
-                <a:spcPts val="0"/>
-              </a:spcAft>
-              <a:buClr>
-                <a:schemeClr val="dk1"/>
-              </a:buClr>
-              <a:buSzPts val="1800"/>
-              <a:buFont typeface="Arial"/>
-              <a:buChar char="•"/>
-            </a:pPr>
-            <a:r>
-              <a:rPr lang="en-US" sz="1800" b="0" i="0" u="none" strike="noStrike" cap="none" dirty="0">
-                <a:solidFill>
-                  <a:schemeClr val="dk1"/>
-                </a:solidFill>
-                <a:latin typeface="Quicksand"/>
-                <a:ea typeface="Quicksand"/>
-                <a:cs typeface="Quicksand"/>
-                <a:sym typeface="Quicksand"/>
-              </a:rPr>
-              <a:t>No stemming or stop word removal, by default.</a:t>
-            </a:r>
-            <a:endParaRPr sz="1400" b="0" i="0" u="none" strike="noStrike" cap="none" dirty="0">
-              <a:solidFill>
-                <a:srgbClr val="000000"/>
-              </a:solidFill>
-              <a:latin typeface="Arial"/>
-              <a:ea typeface="Arial"/>
-              <a:cs typeface="Arial"/>
-              <a:sym typeface="Arial"/>
-            </a:endParaRPr>
-          </a:p>
-          <a:p>
-            <a:pPr marL="285750" marR="0" lvl="0" indent="-171450" algn="l" rtl="0">
-              <a:lnSpc>
-                <a:spcPct val="100000"/>
-              </a:lnSpc>
-              <a:spcBef>
-                <a:spcPts val="0"/>
-              </a:spcBef>
-              <a:spcAft>
-                <a:spcPts val="0"/>
-              </a:spcAft>
-              <a:buClr>
-                <a:schemeClr val="dk1"/>
-              </a:buClr>
-              <a:buSzPts val="1800"/>
-              <a:buFont typeface="Arial"/>
-              <a:buNone/>
-            </a:pPr>
-            <a:endParaRPr sz="1800" b="0" i="0" u="none" strike="noStrike" cap="none" dirty="0">
-              <a:solidFill>
-                <a:schemeClr val="dk1"/>
-              </a:solidFill>
-              <a:latin typeface="Calibri"/>
-              <a:ea typeface="Calibri"/>
-              <a:cs typeface="Calibri"/>
-              <a:sym typeface="Calibri"/>
-            </a:endParaRPr>
-          </a:p>
-          <a:p>
-            <a:pPr marL="0" marR="0" lvl="0" indent="0" algn="l" rtl="0">
-              <a:lnSpc>
-                <a:spcPct val="100000"/>
-              </a:lnSpc>
-              <a:spcBef>
-                <a:spcPts val="0"/>
-              </a:spcBef>
-              <a:spcAft>
-                <a:spcPts val="0"/>
-              </a:spcAft>
-              <a:buClr>
-                <a:srgbClr val="000000"/>
-              </a:buClr>
-              <a:buSzPts val="2000"/>
-              <a:buFont typeface="Arial"/>
-              <a:buNone/>
-            </a:pPr>
-            <a:r>
-              <a:rPr lang="en-US" sz="2000" b="1" i="0" u="none" strike="noStrike" cap="none" dirty="0">
-                <a:solidFill>
-                  <a:schemeClr val="dk1"/>
-                </a:solidFill>
-                <a:latin typeface="Quicksand"/>
-                <a:ea typeface="Quicksand"/>
-                <a:cs typeface="Quicksand"/>
-                <a:sym typeface="Quicksand"/>
-              </a:rPr>
-              <a:t>Architectures for Sequence Data</a:t>
-            </a:r>
-            <a:endParaRPr sz="1400" b="0" i="0" u="none" strike="noStrike" cap="none" dirty="0">
-              <a:solidFill>
-                <a:srgbClr val="000000"/>
-              </a:solidFill>
-              <a:latin typeface="Arial"/>
-              <a:ea typeface="Arial"/>
-              <a:cs typeface="Arial"/>
-              <a:sym typeface="Arial"/>
-            </a:endParaRPr>
-          </a:p>
-          <a:p>
-            <a:pPr marL="285750" marR="0" lvl="0" indent="-285750" algn="l" rtl="0">
-              <a:lnSpc>
-                <a:spcPct val="100000"/>
-              </a:lnSpc>
-              <a:spcBef>
-                <a:spcPts val="0"/>
-              </a:spcBef>
-              <a:spcAft>
-                <a:spcPts val="0"/>
-              </a:spcAft>
-              <a:buClr>
-                <a:schemeClr val="dk1"/>
-              </a:buClr>
-              <a:buSzPts val="1800"/>
-              <a:buFont typeface="Arial"/>
-              <a:buChar char="•"/>
-            </a:pPr>
-            <a:r>
-              <a:rPr lang="en-US" sz="1800" dirty="0">
-                <a:solidFill>
-                  <a:schemeClr val="dk1"/>
-                </a:solidFill>
-                <a:latin typeface="Calibri"/>
-                <a:ea typeface="Calibri"/>
-                <a:cs typeface="Calibri"/>
-                <a:sym typeface="Calibri"/>
-              </a:rPr>
-              <a:t>Recurrent Neural Networks (RNNs)</a:t>
-            </a:r>
-            <a:endParaRPr lang="en-US" sz="1800" b="0" i="0" u="none" strike="noStrike" cap="none" dirty="0">
-              <a:solidFill>
-                <a:schemeClr val="dk1"/>
-              </a:solidFill>
-              <a:latin typeface="Calibri"/>
-              <a:ea typeface="Calibri"/>
-              <a:cs typeface="Calibri"/>
-              <a:sym typeface="Calibri"/>
-            </a:endParaRPr>
-          </a:p>
-          <a:p>
-            <a:pPr marL="285750" marR="0" lvl="0" indent="-285750" algn="l" rtl="0">
-              <a:lnSpc>
-                <a:spcPct val="100000"/>
-              </a:lnSpc>
-              <a:spcBef>
-                <a:spcPts val="0"/>
-              </a:spcBef>
-              <a:spcAft>
-                <a:spcPts val="0"/>
-              </a:spcAft>
-              <a:buClr>
-                <a:schemeClr val="dk1"/>
-              </a:buClr>
-              <a:buSzPts val="1800"/>
-              <a:buFont typeface="Arial"/>
-              <a:buChar char="•"/>
-            </a:pPr>
-            <a:r>
-              <a:rPr lang="en-US" sz="1800" b="0" i="0" u="none" strike="noStrike" cap="none" dirty="0">
-                <a:solidFill>
-                  <a:schemeClr val="dk1"/>
-                </a:solidFill>
-                <a:latin typeface="Calibri"/>
-                <a:ea typeface="Calibri"/>
-                <a:cs typeface="Calibri"/>
-                <a:sym typeface="Calibri"/>
-              </a:rPr>
-              <a:t>Bidirectional LSTM</a:t>
-            </a:r>
-            <a:endParaRPr sz="1400" b="0" i="0" u="none" strike="noStrike" cap="none" dirty="0">
-              <a:solidFill>
-                <a:srgbClr val="000000"/>
-              </a:solidFill>
-              <a:latin typeface="Arial"/>
-              <a:ea typeface="Arial"/>
-              <a:cs typeface="Arial"/>
-              <a:sym typeface="Arial"/>
-            </a:endParaRPr>
-          </a:p>
-        </p:txBody>
-      </p:sp>
-      <p:pic>
-        <p:nvPicPr>
-          <p:cNvPr id="111" name="Google Shape;111;p2" descr="Build an Effective Meeting Agenda Template | WorkPatterns"/>
-          <p:cNvPicPr preferRelativeResize="0"/>
-          <p:nvPr/>
-        </p:nvPicPr>
-        <p:blipFill rotWithShape="1">
-          <a:blip r:embed="rId3">
-            <a:alphaModFix/>
-          </a:blip>
-          <a:srcRect/>
-          <a:stretch/>
-        </p:blipFill>
-        <p:spPr>
-          <a:xfrm>
-            <a:off x="6382305" y="2450790"/>
-            <a:ext cx="6434164" cy="3382963"/>
-          </a:xfrm>
-          <a:prstGeom prst="rect">
-            <a:avLst/>
-          </a:prstGeom>
-          <a:noFill/>
-          <a:ln>
-            <a:noFill/>
-          </a:ln>
-        </p:spPr>
-      </p:pic>
-    </p:spTree>
-  </p:cSld>
-  <p:clrMapOvr>
-    <a:masterClrMapping/>
-  </p:clrMapOvr>
-</p:sld>
-</file>
-
-<file path=ppt/slides/slide20.xml><?xml version="1.0" encoding="utf-8"?>
+<file path=ppt/slides/slide21.xml><?xml version="1.0" encoding="utf-8"?>
 <p:sld xmlns:a="http://schemas.openxmlformats.org/drawingml/2006/main" xmlns:r="http://schemas.openxmlformats.org/officeDocument/2006/relationships" xmlns:p="http://schemas.openxmlformats.org/presentationml/2006/main">
   <p:cSld>
     <p:spTree>
@@ -21759,7 +22188,7 @@
 </p:sld>
 </file>
 
-<file path=ppt/slides/slide21.xml><?xml version="1.0" encoding="utf-8"?>
+<file path=ppt/slides/slide22.xml><?xml version="1.0" encoding="utf-8"?>
 <p:sld xmlns:a="http://schemas.openxmlformats.org/drawingml/2006/main" xmlns:r="http://schemas.openxmlformats.org/officeDocument/2006/relationships" xmlns:p="http://schemas.openxmlformats.org/presentationml/2006/main">
   <p:cSld>
     <p:spTree>
@@ -22091,7 +22520,7 @@
 </p:sld>
 </file>
 
-<file path=ppt/slides/slide22.xml><?xml version="1.0" encoding="utf-8"?>
+<file path=ppt/slides/slide23.xml><?xml version="1.0" encoding="utf-8"?>
 <p:sld xmlns:a="http://schemas.openxmlformats.org/drawingml/2006/main" xmlns:r="http://schemas.openxmlformats.org/officeDocument/2006/relationships" xmlns:p="http://schemas.openxmlformats.org/presentationml/2006/main">
   <p:cSld>
     <p:spTree>
@@ -22383,7 +22812,7 @@
 </p:sld>
 </file>
 
-<file path=ppt/slides/slide23.xml><?xml version="1.0" encoding="utf-8"?>
+<file path=ppt/slides/slide24.xml><?xml version="1.0" encoding="utf-8"?>
 <p:sld xmlns:a="http://schemas.openxmlformats.org/drawingml/2006/main" xmlns:r="http://schemas.openxmlformats.org/officeDocument/2006/relationships" xmlns:p="http://schemas.openxmlformats.org/presentationml/2006/main">
   <p:cSld>
     <p:spTree>
@@ -22755,7 +23184,7 @@
 </p:sld>
 </file>
 
-<file path=ppt/slides/slide24.xml><?xml version="1.0" encoding="utf-8"?>
+<file path=ppt/slides/slide25.xml><?xml version="1.0" encoding="utf-8"?>
 <p:sld xmlns:a="http://schemas.openxmlformats.org/drawingml/2006/main" xmlns:r="http://schemas.openxmlformats.org/officeDocument/2006/relationships" xmlns:p="http://schemas.openxmlformats.org/presentationml/2006/main">
   <p:cSld>
     <p:spTree>
@@ -22847,6 +23276,154 @@
 </file>
 
 <file path=ppt/slides/slide3.xml><?xml version="1.0" encoding="utf-8"?>
+<p:sld xmlns:a="http://schemas.openxmlformats.org/drawingml/2006/main" xmlns:r="http://schemas.openxmlformats.org/officeDocument/2006/relationships" xmlns:p="http://schemas.openxmlformats.org/presentationml/2006/main">
+  <p:cSld>
+    <p:spTree>
+      <p:nvGrpSpPr>
+        <p:cNvPr id="1" name="Shape 108">
+          <a:extLst>
+            <a:ext uri="{FF2B5EF4-FFF2-40B4-BE49-F238E27FC236}">
+              <a16:creationId xmlns:a16="http://schemas.microsoft.com/office/drawing/2014/main" id="{DD4E7B38-A48E-D97D-4E20-0DA40DA78ABB}"/>
+            </a:ext>
+          </a:extLst>
+        </p:cNvPr>
+        <p:cNvGrpSpPr/>
+        <p:nvPr/>
+      </p:nvGrpSpPr>
+      <p:grpSpPr>
+        <a:xfrm>
+          <a:off x="0" y="0"/>
+          <a:ext cx="0" cy="0"/>
+          <a:chOff x="0" y="0"/>
+          <a:chExt cx="0" cy="0"/>
+        </a:xfrm>
+      </p:grpSpPr>
+      <p:sp>
+        <p:nvSpPr>
+          <p:cNvPr id="109" name="Google Shape;109;p2">
+            <a:extLst>
+              <a:ext uri="{FF2B5EF4-FFF2-40B4-BE49-F238E27FC236}">
+                <a16:creationId xmlns:a16="http://schemas.microsoft.com/office/drawing/2014/main" id="{58CB29E0-B27F-4ABA-E386-0105B7F6A78A}"/>
+              </a:ext>
+            </a:extLst>
+          </p:cNvPr>
+          <p:cNvSpPr txBox="1"/>
+          <p:nvPr/>
+        </p:nvSpPr>
+        <p:spPr>
+          <a:xfrm>
+            <a:off x="2865521" y="586938"/>
+            <a:ext cx="6460957" cy="923330"/>
+          </a:xfrm>
+          <a:prstGeom prst="rect">
+            <a:avLst/>
+          </a:prstGeom>
+          <a:noFill/>
+          <a:ln>
+            <a:noFill/>
+          </a:ln>
+        </p:spPr>
+        <p:txBody>
+          <a:bodyPr spcFirstLastPara="1" wrap="square" lIns="91425" tIns="45700" rIns="91425" bIns="45700" anchor="t" anchorCtr="0">
+            <a:spAutoFit/>
+          </a:bodyPr>
+          <a:lstStyle/>
+          <a:p>
+            <a:pPr marL="0" marR="0" lvl="0" indent="0" algn="ctr" rtl="0">
+              <a:lnSpc>
+                <a:spcPct val="100000"/>
+              </a:lnSpc>
+              <a:spcBef>
+                <a:spcPts val="0"/>
+              </a:spcBef>
+              <a:spcAft>
+                <a:spcPts val="0"/>
+              </a:spcAft>
+              <a:buClr>
+                <a:srgbClr val="000000"/>
+              </a:buClr>
+              <a:buSzPts val="5400"/>
+              <a:buFont typeface="Arial"/>
+              <a:buNone/>
+            </a:pPr>
+            <a:r>
+              <a:rPr lang="en-US" sz="5400" b="0" i="0" u="none" strike="noStrike" cap="none" dirty="0">
+                <a:solidFill>
+                  <a:schemeClr val="dk1"/>
+                </a:solidFill>
+                <a:latin typeface="Economica"/>
+                <a:ea typeface="Economica"/>
+                <a:cs typeface="Economica"/>
+                <a:sym typeface="Economica"/>
+              </a:rPr>
+              <a:t>AI in the News</a:t>
+            </a:r>
+            <a:endParaRPr sz="1400" b="0" i="0" u="none" strike="noStrike" cap="none" dirty="0">
+              <a:solidFill>
+                <a:srgbClr val="000000"/>
+              </a:solidFill>
+              <a:latin typeface="Arial"/>
+              <a:ea typeface="Arial"/>
+              <a:cs typeface="Arial"/>
+              <a:sym typeface="Arial"/>
+            </a:endParaRPr>
+          </a:p>
+        </p:txBody>
+      </p:sp>
+      <p:pic>
+        <p:nvPicPr>
+          <p:cNvPr id="2" name="Picture 1">
+            <a:extLst>
+              <a:ext uri="{FF2B5EF4-FFF2-40B4-BE49-F238E27FC236}">
+                <a16:creationId xmlns:a16="http://schemas.microsoft.com/office/drawing/2014/main" id="{3951F876-25DA-D26E-E897-92E1D8A0FC49}"/>
+              </a:ext>
+            </a:extLst>
+          </p:cNvPr>
+          <p:cNvPicPr>
+            <a:picLocks noChangeAspect="1"/>
+          </p:cNvPicPr>
+          <p:nvPr/>
+        </p:nvPicPr>
+        <p:blipFill>
+          <a:blip r:embed="rId3"/>
+          <a:stretch>
+            <a:fillRect/>
+          </a:stretch>
+        </p:blipFill>
+        <p:spPr>
+          <a:xfrm>
+            <a:off x="2209799" y="1951788"/>
+            <a:ext cx="7772400" cy="3521095"/>
+          </a:xfrm>
+          <a:prstGeom prst="rect">
+            <a:avLst/>
+          </a:prstGeom>
+          <a:ln>
+            <a:noFill/>
+          </a:ln>
+          <a:effectLst>
+            <a:outerShdw blurRad="292100" dist="139700" dir="2700000" algn="tl" rotWithShape="0">
+              <a:srgbClr val="333333">
+                <a:alpha val="65000"/>
+              </a:srgbClr>
+            </a:outerShdw>
+          </a:effectLst>
+        </p:spPr>
+      </p:pic>
+    </p:spTree>
+    <p:extLst>
+      <p:ext uri="{BB962C8B-B14F-4D97-AF65-F5344CB8AC3E}">
+        <p14:creationId xmlns:p14="http://schemas.microsoft.com/office/powerpoint/2010/main" val="172392509"/>
+      </p:ext>
+    </p:extLst>
+  </p:cSld>
+  <p:clrMapOvr>
+    <a:masterClrMapping/>
+  </p:clrMapOvr>
+</p:sld>
+</file>
+
+<file path=ppt/slides/slide4.xml><?xml version="1.0" encoding="utf-8"?>
 <p:sld xmlns:a="http://schemas.openxmlformats.org/drawingml/2006/main" xmlns:r="http://schemas.openxmlformats.org/officeDocument/2006/relationships" xmlns:p="http://schemas.openxmlformats.org/presentationml/2006/main">
   <p:cSld>
     <p:spTree>
@@ -28637,7 +29214,7 @@
 </p:sld>
 </file>
 
-<file path=ppt/slides/slide4.xml><?xml version="1.0" encoding="utf-8"?>
+<file path=ppt/slides/slide5.xml><?xml version="1.0" encoding="utf-8"?>
 <p:sld xmlns:a="http://schemas.openxmlformats.org/drawingml/2006/main" xmlns:r="http://schemas.openxmlformats.org/officeDocument/2006/relationships" xmlns:p="http://schemas.openxmlformats.org/presentationml/2006/main">
   <p:cSld>
     <p:spTree>
@@ -29046,7 +29623,7 @@
 </p:sld>
 </file>
 
-<file path=ppt/slides/slide5.xml><?xml version="1.0" encoding="utf-8"?>
+<file path=ppt/slides/slide6.xml><?xml version="1.0" encoding="utf-8"?>
 <p:sld xmlns:a="http://schemas.openxmlformats.org/drawingml/2006/main" xmlns:r="http://schemas.openxmlformats.org/officeDocument/2006/relationships" xmlns:p="http://schemas.openxmlformats.org/presentationml/2006/main">
   <p:cSld>
     <p:bg>
@@ -29620,7 +30197,7 @@
 </p:sld>
 </file>
 
-<file path=ppt/slides/slide6.xml><?xml version="1.0" encoding="utf-8"?>
+<file path=ppt/slides/slide7.xml><?xml version="1.0" encoding="utf-8"?>
 <p:sld xmlns:a="http://schemas.openxmlformats.org/drawingml/2006/main" xmlns:r="http://schemas.openxmlformats.org/officeDocument/2006/relationships" xmlns:p="http://schemas.openxmlformats.org/presentationml/2006/main">
   <p:cSld>
     <p:spTree>
@@ -29830,7 +30407,7 @@
 </p:sld>
 </file>
 
-<file path=ppt/slides/slide7.xml><?xml version="1.0" encoding="utf-8"?>
+<file path=ppt/slides/slide8.xml><?xml version="1.0" encoding="utf-8"?>
 <p:sld xmlns:a="http://schemas.openxmlformats.org/drawingml/2006/main" xmlns:r="http://schemas.openxmlformats.org/officeDocument/2006/relationships" xmlns:p="http://schemas.openxmlformats.org/presentationml/2006/main">
   <p:cSld>
     <p:spTree>
@@ -30004,7 +30581,7 @@
 </p:sld>
 </file>
 
-<file path=ppt/slides/slide8.xml><?xml version="1.0" encoding="utf-8"?>
+<file path=ppt/slides/slide9.xml><?xml version="1.0" encoding="utf-8"?>
 <p:sld xmlns:a="http://schemas.openxmlformats.org/drawingml/2006/main" xmlns:r="http://schemas.openxmlformats.org/officeDocument/2006/relationships" xmlns:p="http://schemas.openxmlformats.org/presentationml/2006/main">
   <p:cSld>
     <p:spTree>
@@ -30186,289 +30763,6 @@
         <p14:creationId xmlns:p14="http://schemas.microsoft.com/office/powerpoint/2010/main" val="4079830176"/>
       </p:ext>
     </p:extLst>
-  </p:cSld>
-  <p:clrMapOvr>
-    <a:masterClrMapping/>
-  </p:clrMapOvr>
-</p:sld>
-</file>
-
-<file path=ppt/slides/slide9.xml><?xml version="1.0" encoding="utf-8"?>
-<p:sld xmlns:a="http://schemas.openxmlformats.org/drawingml/2006/main" xmlns:r="http://schemas.openxmlformats.org/officeDocument/2006/relationships" xmlns:p="http://schemas.openxmlformats.org/presentationml/2006/main">
-  <p:cSld>
-    <p:spTree>
-      <p:nvGrpSpPr>
-        <p:cNvPr id="1" name="Shape 137"/>
-        <p:cNvGrpSpPr/>
-        <p:nvPr/>
-      </p:nvGrpSpPr>
-      <p:grpSpPr>
-        <a:xfrm>
-          <a:off x="0" y="0"/>
-          <a:ext cx="0" cy="0"/>
-          <a:chOff x="0" y="0"/>
-          <a:chExt cx="0" cy="0"/>
-        </a:xfrm>
-      </p:grpSpPr>
-      <p:sp>
-        <p:nvSpPr>
-          <p:cNvPr id="138" name="Google Shape;138;p7"/>
-          <p:cNvSpPr txBox="1"/>
-          <p:nvPr/>
-        </p:nvSpPr>
-        <p:spPr>
-          <a:xfrm>
-            <a:off x="2155062" y="658976"/>
-            <a:ext cx="7881869" cy="923289"/>
-          </a:xfrm>
-          <a:prstGeom prst="rect">
-            <a:avLst/>
-          </a:prstGeom>
-          <a:noFill/>
-          <a:ln>
-            <a:noFill/>
-          </a:ln>
-        </p:spPr>
-        <p:txBody>
-          <a:bodyPr spcFirstLastPara="1" wrap="square" lIns="91425" tIns="45700" rIns="91425" bIns="45700" anchor="t" anchorCtr="0">
-            <a:spAutoFit/>
-          </a:bodyPr>
-          <a:lstStyle/>
-          <a:p>
-            <a:pPr marL="0" marR="0" lvl="0" indent="0" algn="ctr" rtl="0">
-              <a:spcBef>
-                <a:spcPts val="0"/>
-              </a:spcBef>
-              <a:spcAft>
-                <a:spcPts val="0"/>
-              </a:spcAft>
-              <a:buNone/>
-            </a:pPr>
-            <a:r>
-              <a:rPr lang="en-US" sz="5400" dirty="0">
-                <a:solidFill>
-                  <a:schemeClr val="dk1"/>
-                </a:solidFill>
-                <a:latin typeface="Economica"/>
-                <a:ea typeface="Economica"/>
-                <a:cs typeface="Economica"/>
-                <a:sym typeface="Economica"/>
-              </a:rPr>
-              <a:t>‘Recurrent’ Neural Network (RNN)</a:t>
-            </a:r>
-            <a:endParaRPr dirty="0"/>
-          </a:p>
-        </p:txBody>
-      </p:sp>
-      <p:sp>
-        <p:nvSpPr>
-          <p:cNvPr id="139" name="Google Shape;139;p7"/>
-          <p:cNvSpPr txBox="1"/>
-          <p:nvPr/>
-        </p:nvSpPr>
-        <p:spPr>
-          <a:xfrm>
-            <a:off x="890337" y="1861226"/>
-            <a:ext cx="10016362" cy="1508065"/>
-          </a:xfrm>
-          <a:prstGeom prst="rect">
-            <a:avLst/>
-          </a:prstGeom>
-          <a:noFill/>
-          <a:ln>
-            <a:noFill/>
-          </a:ln>
-        </p:spPr>
-        <p:txBody>
-          <a:bodyPr spcFirstLastPara="1" wrap="square" lIns="91425" tIns="45700" rIns="91425" bIns="45700" anchor="t" anchorCtr="0">
-            <a:spAutoFit/>
-          </a:bodyPr>
-          <a:lstStyle/>
-          <a:p>
-            <a:pPr marL="0" marR="0" lvl="0" indent="0" algn="l" rtl="0">
-              <a:spcBef>
-                <a:spcPts val="0"/>
-              </a:spcBef>
-              <a:spcAft>
-                <a:spcPts val="0"/>
-              </a:spcAft>
-              <a:buNone/>
-            </a:pPr>
-            <a:r>
-              <a:rPr lang="en-US" sz="2000" b="1" dirty="0" err="1">
-                <a:solidFill>
-                  <a:schemeClr val="dk1"/>
-                </a:solidFill>
-                <a:latin typeface="Quicksand"/>
-                <a:ea typeface="Quicksand"/>
-                <a:cs typeface="Quicksand"/>
-                <a:sym typeface="Quicksand"/>
-              </a:rPr>
-              <a:t>Keras</a:t>
-            </a:r>
-            <a:r>
-              <a:rPr lang="en-US" sz="2000" b="1" dirty="0">
-                <a:solidFill>
-                  <a:schemeClr val="dk1"/>
-                </a:solidFill>
-                <a:latin typeface="Quicksand"/>
-                <a:ea typeface="Quicksand"/>
-                <a:cs typeface="Quicksand"/>
-                <a:sym typeface="Quicksand"/>
-              </a:rPr>
-              <a:t> Layer </a:t>
-            </a:r>
-            <a:r>
-              <a:rPr lang="en-US" sz="2000" b="1" dirty="0" err="1">
-                <a:solidFill>
-                  <a:schemeClr val="dk1"/>
-                </a:solidFill>
-                <a:latin typeface="Quicksand"/>
-                <a:ea typeface="Quicksand"/>
-                <a:cs typeface="Quicksand"/>
-                <a:sym typeface="Quicksand"/>
-              </a:rPr>
-              <a:t>SimpleRNN</a:t>
-            </a:r>
-            <a:endParaRPr sz="2000" b="1" dirty="0">
-              <a:solidFill>
-                <a:schemeClr val="dk1"/>
-              </a:solidFill>
-              <a:latin typeface="Quicksand"/>
-              <a:ea typeface="Quicksand"/>
-              <a:cs typeface="Quicksand"/>
-              <a:sym typeface="Quicksand"/>
-            </a:endParaRPr>
-          </a:p>
-          <a:p>
-            <a:pPr marL="285750" marR="0" lvl="0" indent="-285750" algn="l" rtl="0">
-              <a:spcBef>
-                <a:spcPts val="0"/>
-              </a:spcBef>
-              <a:spcAft>
-                <a:spcPts val="0"/>
-              </a:spcAft>
-              <a:buClr>
-                <a:schemeClr val="dk1"/>
-              </a:buClr>
-              <a:buSzPts val="1800"/>
-              <a:buFont typeface="Arial"/>
-              <a:buChar char="•"/>
-            </a:pPr>
-            <a:r>
-              <a:rPr lang="en-US" sz="1800" dirty="0">
-                <a:solidFill>
-                  <a:schemeClr val="dk1"/>
-                </a:solidFill>
-                <a:latin typeface="Calibri"/>
-                <a:ea typeface="Calibri"/>
-                <a:cs typeface="Calibri"/>
-                <a:sym typeface="Calibri"/>
-              </a:rPr>
-              <a:t>It’s a Dense layer that processes input token by token, with a feedback loop.</a:t>
-            </a:r>
-            <a:endParaRPr dirty="0"/>
-          </a:p>
-          <a:p>
-            <a:pPr marL="285750" lvl="0" indent="-285750">
-              <a:buClr>
-                <a:schemeClr val="dk1"/>
-              </a:buClr>
-              <a:buSzPts val="1800"/>
-              <a:buFont typeface="Arial"/>
-              <a:buChar char="•"/>
-            </a:pPr>
-            <a:r>
-              <a:rPr lang="en-US" sz="1800" dirty="0">
-                <a:solidFill>
-                  <a:schemeClr val="dk1"/>
-                </a:solidFill>
-                <a:latin typeface="Calibri"/>
-                <a:ea typeface="Calibri"/>
-                <a:cs typeface="Calibri"/>
-                <a:sym typeface="Calibri"/>
-              </a:rPr>
-              <a:t>The inputs are arranged to interact with one another based on their temporal sequencing in the data.</a:t>
-            </a:r>
-            <a:endParaRPr dirty="0"/>
-          </a:p>
-          <a:p>
-            <a:pPr marL="285750" lvl="0" indent="-285750">
-              <a:buClr>
-                <a:schemeClr val="dk1"/>
-              </a:buClr>
-              <a:buSzPts val="1800"/>
-              <a:buFont typeface="Arial"/>
-              <a:buChar char="•"/>
-            </a:pPr>
-            <a:r>
-              <a:rPr lang="en-US" sz="1800" dirty="0">
-                <a:solidFill>
-                  <a:schemeClr val="dk1"/>
-                </a:solidFill>
-                <a:latin typeface="Calibri"/>
-                <a:ea typeface="Calibri"/>
-                <a:cs typeface="Calibri"/>
-                <a:sym typeface="Calibri"/>
-              </a:rPr>
-              <a:t>In practice, we cannot use </a:t>
-            </a:r>
-            <a:r>
-              <a:rPr lang="en-US" sz="1800" dirty="0" err="1">
-                <a:solidFill>
-                  <a:schemeClr val="dk1"/>
-                </a:solidFill>
-                <a:latin typeface="Calibri"/>
-                <a:ea typeface="Calibri"/>
-                <a:cs typeface="Calibri"/>
-                <a:sym typeface="Calibri"/>
-              </a:rPr>
-              <a:t>SimpleRNNs</a:t>
-            </a:r>
-            <a:r>
-              <a:rPr lang="en-US" sz="1800" dirty="0">
-                <a:solidFill>
-                  <a:schemeClr val="dk1"/>
-                </a:solidFill>
-                <a:latin typeface="Calibri"/>
-                <a:ea typeface="Calibri"/>
-                <a:cs typeface="Calibri"/>
-                <a:sym typeface="Calibri"/>
-              </a:rPr>
-              <a:t> to achieve meaningful memory (vanishing gradients arise very quickly! Can you see why?).</a:t>
-            </a:r>
-            <a:endParaRPr dirty="0"/>
-          </a:p>
-        </p:txBody>
-      </p:sp>
-      <p:pic>
-        <p:nvPicPr>
-          <p:cNvPr id="140" name="Google Shape;140;p7"/>
-          <p:cNvPicPr preferRelativeResize="0"/>
-          <p:nvPr/>
-        </p:nvPicPr>
-        <p:blipFill rotWithShape="1">
-          <a:blip r:embed="rId3">
-            <a:alphaModFix/>
-          </a:blip>
-          <a:srcRect/>
-          <a:stretch/>
-        </p:blipFill>
-        <p:spPr>
-          <a:xfrm>
-            <a:off x="1804103" y="3684058"/>
-            <a:ext cx="8583789" cy="2258892"/>
-          </a:xfrm>
-          <a:prstGeom prst="rect">
-            <a:avLst/>
-          </a:prstGeom>
-          <a:noFill/>
-          <a:ln>
-            <a:noFill/>
-          </a:ln>
-        </p:spPr>
-      </p:pic>
-    </p:spTree>
   </p:cSld>
   <p:clrMapOvr>
     <a:masterClrMapping/>
